--- a/deliverables/Presentation.pptx
+++ b/deliverables/Presentation.pptx
@@ -16,6 +16,8 @@
     <p:sldId id="264" r:id="rId15"/>
     <p:sldId id="265" r:id="rId16"/>
     <p:sldId id="266" r:id="rId17"/>
+    <p:sldId id="267" r:id="rId18"/>
+    <p:sldId id="268" r:id="rId19"/>
   </p:sldIdLst>
   <p:sldSz cx="12191695" cy="6858000" type="screen4x3"/>
   <p:notesSz cx="6858000" cy="9144000"/>
@@ -3114,7 +3116,7 @@
         </p:nvSpPr>
         <p:spPr>
           <a:xfrm>
-            <a:off x="822960" y="2103120"/>
+            <a:off x="822960" y="1554480"/>
             <a:ext cx="10515600" cy="1188720"/>
           </a:xfrm>
           <a:prstGeom prst="rect">
@@ -3147,7 +3149,7 @@
         </p:nvSpPr>
         <p:spPr>
           <a:xfrm>
-            <a:off x="822960" y="3246120"/>
+            <a:off x="822960" y="2697480"/>
             <a:ext cx="10515600" cy="822960"/>
           </a:xfrm>
           <a:prstGeom prst="rect">
@@ -3180,8 +3182,8 @@
         </p:nvSpPr>
         <p:spPr>
           <a:xfrm>
-            <a:off x="822960" y="5120640"/>
-            <a:ext cx="10515600" cy="1097280"/>
+            <a:off x="822960" y="3749039"/>
+            <a:ext cx="10515600" cy="365760"/>
           </a:xfrm>
           <a:prstGeom prst="rect">
             <a:avLst/>
@@ -3200,27 +3202,259 @@
                   <a:srgbClr val="FFFFFF"/>
                 </a:solidFill>
               </a:rPr>
-              <a:t>Group: [Group Name / Number]</a:t>
-            </a:r>
-          </a:p>
-          <a:p>
-            <a:r>
-              <a:rPr sz="1400">
+              <a:t>Mini-Project: Build and Evaluate a Practical RAG Assistant — 30 July 2026 — Group: [Group Name / Number]</a:t>
+            </a:r>
+          </a:p>
+        </p:txBody>
+      </p:sp>
+      <p:sp>
+        <p:nvSpPr>
+          <p:cNvPr id="5" name="Rounded Rectangle 4"/>
+          <p:cNvSpPr/>
+          <p:nvPr/>
+        </p:nvSpPr>
+        <p:spPr>
+          <a:xfrm>
+            <a:off x="822960" y="4480560"/>
+            <a:ext cx="2606040" cy="1188720"/>
+          </a:xfrm>
+          <a:prstGeom prst="roundRect">
+            <a:avLst/>
+          </a:prstGeom>
+          <a:solidFill>
+            <a:srgbClr val="2E7D5B"/>
+          </a:solidFill>
+          <a:ln>
+            <a:noFill/>
+          </a:ln>
+          <a:effectLst/>
+        </p:spPr>
+        <p:style>
+          <a:lnRef idx="1">
+            <a:schemeClr val="accent1"/>
+          </a:lnRef>
+          <a:fillRef idx="3">
+            <a:schemeClr val="accent1"/>
+          </a:fillRef>
+          <a:effectRef idx="2">
+            <a:schemeClr val="accent1"/>
+          </a:effectRef>
+          <a:fontRef idx="minor">
+            <a:schemeClr val="lt1"/>
+          </a:fontRef>
+        </p:style>
+        <p:txBody>
+          <a:bodyPr rtlCol="0" anchor="ctr" wrap="square"/>
+          <a:lstStyle/>
+          <a:p>
+            <a:pPr algn="ctr"/>
+            <a:r>
+              <a:rPr sz="1250" b="1">
                 <a:solidFill>
                   <a:srgbClr val="FFFFFF"/>
                 </a:solidFill>
               </a:rPr>
-              <a:t>Members: [Name 1] · [Name 2] · [Name 3] · [Name 4]</a:t>
-            </a:r>
-          </a:p>
-          <a:p>
-            <a:r>
-              <a:rPr sz="1400">
-                <a:solidFill>
-                  <a:srgbClr val="9BB0C8"/>
-                </a:solidFill>
-              </a:rPr>
-              <a:t>Mini-Project: Build and Evaluate a Practical RAG Assistant — 30 July 2026</a:t>
+              <a:t>Part 1 · DATA &amp; INGESTION</a:t>
+            </a:r>
+          </a:p>
+          <a:p>
+            <a:pPr algn="ctr"/>
+            <a:r>
+              <a:rPr sz="1300" i="1">
+                <a:solidFill>
+                  <a:srgbClr val="FFFFFF"/>
+                </a:solidFill>
+              </a:rPr>
+              <a:t>[Name 1]</a:t>
+            </a:r>
+          </a:p>
+        </p:txBody>
+      </p:sp>
+      <p:sp>
+        <p:nvSpPr>
+          <p:cNvPr id="6" name="Rounded Rectangle 5"/>
+          <p:cNvSpPr/>
+          <p:nvPr/>
+        </p:nvSpPr>
+        <p:spPr>
+          <a:xfrm>
+            <a:off x="3566160" y="4480560"/>
+            <a:ext cx="2606040" cy="1188720"/>
+          </a:xfrm>
+          <a:prstGeom prst="roundRect">
+            <a:avLst/>
+          </a:prstGeom>
+          <a:solidFill>
+            <a:srgbClr val="1F6FB2"/>
+          </a:solidFill>
+          <a:ln>
+            <a:noFill/>
+          </a:ln>
+          <a:effectLst/>
+        </p:spPr>
+        <p:style>
+          <a:lnRef idx="1">
+            <a:schemeClr val="accent1"/>
+          </a:lnRef>
+          <a:fillRef idx="3">
+            <a:schemeClr val="accent1"/>
+          </a:fillRef>
+          <a:effectRef idx="2">
+            <a:schemeClr val="accent1"/>
+          </a:effectRef>
+          <a:fontRef idx="minor">
+            <a:schemeClr val="lt1"/>
+          </a:fontRef>
+        </p:style>
+        <p:txBody>
+          <a:bodyPr rtlCol="0" anchor="ctr" wrap="square"/>
+          <a:lstStyle/>
+          <a:p>
+            <a:pPr algn="ctr"/>
+            <a:r>
+              <a:rPr sz="1250" b="1">
+                <a:solidFill>
+                  <a:srgbClr val="FFFFFF"/>
+                </a:solidFill>
+              </a:rPr>
+              <a:t>Part 2 · RETRIEVAL</a:t>
+            </a:r>
+          </a:p>
+          <a:p>
+            <a:pPr algn="ctr"/>
+            <a:r>
+              <a:rPr sz="1300" i="1">
+                <a:solidFill>
+                  <a:srgbClr val="FFFFFF"/>
+                </a:solidFill>
+              </a:rPr>
+              <a:t>[Name 2]</a:t>
+            </a:r>
+          </a:p>
+        </p:txBody>
+      </p:sp>
+      <p:sp>
+        <p:nvSpPr>
+          <p:cNvPr id="7" name="Rounded Rectangle 6"/>
+          <p:cNvSpPr/>
+          <p:nvPr/>
+        </p:nvSpPr>
+        <p:spPr>
+          <a:xfrm>
+            <a:off x="6309360" y="4480560"/>
+            <a:ext cx="2606040" cy="1188720"/>
+          </a:xfrm>
+          <a:prstGeom prst="roundRect">
+            <a:avLst/>
+          </a:prstGeom>
+          <a:solidFill>
+            <a:srgbClr val="6B3FA0"/>
+          </a:solidFill>
+          <a:ln>
+            <a:noFill/>
+          </a:ln>
+          <a:effectLst/>
+        </p:spPr>
+        <p:style>
+          <a:lnRef idx="1">
+            <a:schemeClr val="accent1"/>
+          </a:lnRef>
+          <a:fillRef idx="3">
+            <a:schemeClr val="accent1"/>
+          </a:fillRef>
+          <a:effectRef idx="2">
+            <a:schemeClr val="accent1"/>
+          </a:effectRef>
+          <a:fontRef idx="minor">
+            <a:schemeClr val="lt1"/>
+          </a:fontRef>
+        </p:style>
+        <p:txBody>
+          <a:bodyPr rtlCol="0" anchor="ctr" wrap="square"/>
+          <a:lstStyle/>
+          <a:p>
+            <a:pPr algn="ctr"/>
+            <a:r>
+              <a:rPr sz="1250" b="1">
+                <a:solidFill>
+                  <a:srgbClr val="FFFFFF"/>
+                </a:solidFill>
+              </a:rPr>
+              <a:t>Part 3 · GENERATION &amp; APPLICATION</a:t>
+            </a:r>
+          </a:p>
+          <a:p>
+            <a:pPr algn="ctr"/>
+            <a:r>
+              <a:rPr sz="1300" i="1">
+                <a:solidFill>
+                  <a:srgbClr val="FFFFFF"/>
+                </a:solidFill>
+              </a:rPr>
+              <a:t>[Name 3]</a:t>
+            </a:r>
+          </a:p>
+        </p:txBody>
+      </p:sp>
+      <p:sp>
+        <p:nvSpPr>
+          <p:cNvPr id="8" name="Rounded Rectangle 7"/>
+          <p:cNvSpPr/>
+          <p:nvPr/>
+        </p:nvSpPr>
+        <p:spPr>
+          <a:xfrm>
+            <a:off x="9052560" y="4480560"/>
+            <a:ext cx="2606040" cy="1188720"/>
+          </a:xfrm>
+          <a:prstGeom prst="roundRect">
+            <a:avLst/>
+          </a:prstGeom>
+          <a:solidFill>
+            <a:srgbClr val="B2691F"/>
+          </a:solidFill>
+          <a:ln>
+            <a:noFill/>
+          </a:ln>
+          <a:effectLst/>
+        </p:spPr>
+        <p:style>
+          <a:lnRef idx="1">
+            <a:schemeClr val="accent1"/>
+          </a:lnRef>
+          <a:fillRef idx="3">
+            <a:schemeClr val="accent1"/>
+          </a:fillRef>
+          <a:effectRef idx="2">
+            <a:schemeClr val="accent1"/>
+          </a:effectRef>
+          <a:fontRef idx="minor">
+            <a:schemeClr val="lt1"/>
+          </a:fontRef>
+        </p:style>
+        <p:txBody>
+          <a:bodyPr rtlCol="0" anchor="ctr" wrap="square"/>
+          <a:lstStyle/>
+          <a:p>
+            <a:pPr algn="ctr"/>
+            <a:r>
+              <a:rPr sz="1250" b="1">
+                <a:solidFill>
+                  <a:srgbClr val="FFFFFF"/>
+                </a:solidFill>
+              </a:rPr>
+              <a:t>Part 4 · EVALUATION &amp; TESTING</a:t>
+            </a:r>
+          </a:p>
+          <a:p>
+            <a:pPr algn="ctr"/>
+            <a:r>
+              <a:rPr sz="1300" i="1">
+                <a:solidFill>
+                  <a:srgbClr val="FFFFFF"/>
+                </a:solidFill>
+              </a:rPr>
+              <a:t>[Name 4]</a:t>
             </a:r>
           </a:p>
         </p:txBody>
@@ -3266,7 +3500,7 @@
             <a:avLst/>
           </a:prstGeom>
           <a:solidFill>
-            <a:srgbClr val="1F3A5F"/>
+            <a:srgbClr val="B2691F"/>
           </a:solidFill>
           <a:ln>
             <a:noFill/>
@@ -3323,7 +3557,7 @@
                   <a:srgbClr val="B9CCE0"/>
                 </a:solidFill>
               </a:rPr>
-              <a:t>1–2 MIN</a:t>
+              <a:t>PART 4 OF 4 · EVALUATION &amp; TESTING · ~1 MIN</a:t>
             </a:r>
           </a:p>
         </p:txBody>
@@ -3356,7 +3590,7 @@
                   <a:srgbClr val="FFFFFF"/>
                 </a:solidFill>
               </a:rPr>
-              <a:t>Limitations &amp; Lessons Learned</a:t>
+              <a:t>Baseline (Dense) vs. Improved (Hybrid) Results</a:t>
             </a:r>
           </a:p>
         </p:txBody>
@@ -3369,8 +3603,700 @@
         </p:nvSpPr>
         <p:spPr>
           <a:xfrm>
-            <a:off x="640080" y="1417320"/>
-            <a:ext cx="10881360" cy="4937760"/>
+            <a:off x="9326880" y="6446520"/>
+            <a:ext cx="2651760" cy="320040"/>
+          </a:xfrm>
+          <a:prstGeom prst="rect">
+            <a:avLst/>
+          </a:prstGeom>
+          <a:noFill/>
+        </p:spPr>
+        <p:txBody>
+          <a:bodyPr wrap="none">
+            <a:spAutoFit/>
+          </a:bodyPr>
+          <a:lstStyle/>
+          <a:p>
+            <a:pPr algn="r"/>
+            <a:r>
+              <a:rPr sz="1100" b="1" i="0">
+                <a:solidFill>
+                  <a:srgbClr val="B2691F"/>
+                </a:solidFill>
+              </a:rPr>
+              <a:t>● Presenter: [Name 4]</a:t>
+            </a:r>
+          </a:p>
+        </p:txBody>
+      </p:sp>
+      <p:graphicFrame>
+        <p:nvGraphicFramePr>
+          <p:cNvPr id="6" name="Table 5"/>
+          <p:cNvGraphicFramePr>
+            <a:graphicFrameLocks noGrp="1"/>
+          </p:cNvGraphicFramePr>
+          <p:nvPr/>
+        </p:nvGraphicFramePr>
+        <p:xfrm>
+          <a:off x="1645920" y="1463040"/>
+          <a:ext cx="8869680" cy="3200400"/>
+        </p:xfrm>
+        <a:graphic>
+          <a:graphicData uri="http://schemas.openxmlformats.org/drawingml/2006/table">
+            <a:tbl>
+              <a:tblPr firstRow="1" bandRow="1">
+                <a:tableStyleId>{5C22544A-7EE6-4342-B048-85BDC9FD1C3A}</a:tableStyleId>
+              </a:tblPr>
+              <a:tblGrid>
+                <a:gridCol w="3017520"/>
+                <a:gridCol w="1828800"/>
+                <a:gridCol w="1828800"/>
+                <a:gridCol w="2194560"/>
+              </a:tblGrid>
+              <a:tr h="457200">
+                <a:tc>
+                  <a:txBody>
+                    <a:bodyPr/>
+                    <a:lstStyle/>
+                    <a:p>
+                      <a:pPr algn="ctr"/>
+                      <a:r>
+                        <a:rPr b="1" sz="1500">
+                          <a:solidFill>
+                            <a:srgbClr val="FFFFFF"/>
+                          </a:solidFill>
+                        </a:rPr>
+                        <a:t>Metric</a:t>
+                      </a:r>
+                    </a:p>
+                  </a:txBody>
+                  <a:tcPr>
+                    <a:solidFill>
+                      <a:srgbClr val="B2691F"/>
+                    </a:solidFill>
+                  </a:tcPr>
+                </a:tc>
+                <a:tc>
+                  <a:txBody>
+                    <a:bodyPr/>
+                    <a:lstStyle/>
+                    <a:p>
+                      <a:pPr algn="ctr"/>
+                      <a:r>
+                        <a:rPr b="1" sz="1500">
+                          <a:solidFill>
+                            <a:srgbClr val="FFFFFF"/>
+                          </a:solidFill>
+                        </a:rPr>
+                        <a:t>Dense</a:t>
+                      </a:r>
+                    </a:p>
+                  </a:txBody>
+                  <a:tcPr>
+                    <a:solidFill>
+                      <a:srgbClr val="B2691F"/>
+                    </a:solidFill>
+                  </a:tcPr>
+                </a:tc>
+                <a:tc>
+                  <a:txBody>
+                    <a:bodyPr/>
+                    <a:lstStyle/>
+                    <a:p>
+                      <a:pPr algn="ctr"/>
+                      <a:r>
+                        <a:rPr b="1" sz="1500">
+                          <a:solidFill>
+                            <a:srgbClr val="FFFFFF"/>
+                          </a:solidFill>
+                        </a:rPr>
+                        <a:t>Hybrid</a:t>
+                      </a:r>
+                    </a:p>
+                  </a:txBody>
+                  <a:tcPr>
+                    <a:solidFill>
+                      <a:srgbClr val="B2691F"/>
+                    </a:solidFill>
+                  </a:tcPr>
+                </a:tc>
+                <a:tc>
+                  <a:txBody>
+                    <a:bodyPr/>
+                    <a:lstStyle/>
+                    <a:p>
+                      <a:pPr algn="ctr"/>
+                      <a:r>
+                        <a:rPr b="1" sz="1500">
+                          <a:solidFill>
+                            <a:srgbClr val="FFFFFF"/>
+                          </a:solidFill>
+                        </a:rPr>
+                        <a:t>Δ</a:t>
+                      </a:r>
+                    </a:p>
+                  </a:txBody>
+                  <a:tcPr>
+                    <a:solidFill>
+                      <a:srgbClr val="B2691F"/>
+                    </a:solidFill>
+                  </a:tcPr>
+                </a:tc>
+              </a:tr>
+              <a:tr h="457200">
+                <a:tc>
+                  <a:txBody>
+                    <a:bodyPr/>
+                    <a:lstStyle/>
+                    <a:p>
+                      <a:pPr algn="ctr"/>
+                      <a:r>
+                        <a:rPr sz="1500">
+                          <a:solidFill>
+                            <a:srgbClr val="222222"/>
+                          </a:solidFill>
+                        </a:rPr>
+                        <a:t>Hit rate</a:t>
+                      </a:r>
+                    </a:p>
+                  </a:txBody>
+                  <a:tcPr>
+                    <a:solidFill>
+                      <a:srgbClr val="FFFFFF"/>
+                    </a:solidFill>
+                  </a:tcPr>
+                </a:tc>
+                <a:tc>
+                  <a:txBody>
+                    <a:bodyPr/>
+                    <a:lstStyle/>
+                    <a:p>
+                      <a:pPr algn="ctr"/>
+                      <a:r>
+                        <a:rPr sz="1500">
+                          <a:solidFill>
+                            <a:srgbClr val="222222"/>
+                          </a:solidFill>
+                        </a:rPr>
+                        <a:t>25.0%</a:t>
+                      </a:r>
+                    </a:p>
+                  </a:txBody>
+                  <a:tcPr>
+                    <a:solidFill>
+                      <a:srgbClr val="FFFFFF"/>
+                    </a:solidFill>
+                  </a:tcPr>
+                </a:tc>
+                <a:tc>
+                  <a:txBody>
+                    <a:bodyPr/>
+                    <a:lstStyle/>
+                    <a:p>
+                      <a:pPr algn="ctr"/>
+                      <a:r>
+                        <a:rPr sz="1500">
+                          <a:solidFill>
+                            <a:srgbClr val="222222"/>
+                          </a:solidFill>
+                        </a:rPr>
+                        <a:t>37.5%</a:t>
+                      </a:r>
+                    </a:p>
+                  </a:txBody>
+                  <a:tcPr>
+                    <a:solidFill>
+                      <a:srgbClr val="FFFFFF"/>
+                    </a:solidFill>
+                  </a:tcPr>
+                </a:tc>
+                <a:tc>
+                  <a:txBody>
+                    <a:bodyPr/>
+                    <a:lstStyle/>
+                    <a:p>
+                      <a:pPr algn="ctr"/>
+                      <a:r>
+                        <a:rPr sz="1500">
+                          <a:solidFill>
+                            <a:srgbClr val="222222"/>
+                          </a:solidFill>
+                        </a:rPr>
+                        <a:t>+12.5 pp</a:t>
+                      </a:r>
+                    </a:p>
+                  </a:txBody>
+                  <a:tcPr>
+                    <a:solidFill>
+                      <a:srgbClr val="FFFFFF"/>
+                    </a:solidFill>
+                  </a:tcPr>
+                </a:tc>
+              </a:tr>
+              <a:tr h="457200">
+                <a:tc>
+                  <a:txBody>
+                    <a:bodyPr/>
+                    <a:lstStyle/>
+                    <a:p>
+                      <a:pPr algn="ctr"/>
+                      <a:r>
+                        <a:rPr sz="1500">
+                          <a:solidFill>
+                            <a:srgbClr val="222222"/>
+                          </a:solidFill>
+                        </a:rPr>
+                        <a:t>Recall@5</a:t>
+                      </a:r>
+                    </a:p>
+                  </a:txBody>
+                  <a:tcPr>
+                    <a:solidFill>
+                      <a:srgbClr val="E9EEF4"/>
+                    </a:solidFill>
+                  </a:tcPr>
+                </a:tc>
+                <a:tc>
+                  <a:txBody>
+                    <a:bodyPr/>
+                    <a:lstStyle/>
+                    <a:p>
+                      <a:pPr algn="ctr"/>
+                      <a:r>
+                        <a:rPr sz="1500">
+                          <a:solidFill>
+                            <a:srgbClr val="222222"/>
+                          </a:solidFill>
+                        </a:rPr>
+                        <a:t>18.8%</a:t>
+                      </a:r>
+                    </a:p>
+                  </a:txBody>
+                  <a:tcPr>
+                    <a:solidFill>
+                      <a:srgbClr val="E9EEF4"/>
+                    </a:solidFill>
+                  </a:tcPr>
+                </a:tc>
+                <a:tc>
+                  <a:txBody>
+                    <a:bodyPr/>
+                    <a:lstStyle/>
+                    <a:p>
+                      <a:pPr algn="ctr"/>
+                      <a:r>
+                        <a:rPr sz="1500">
+                          <a:solidFill>
+                            <a:srgbClr val="222222"/>
+                          </a:solidFill>
+                        </a:rPr>
+                        <a:t>31.2%</a:t>
+                      </a:r>
+                    </a:p>
+                  </a:txBody>
+                  <a:tcPr>
+                    <a:solidFill>
+                      <a:srgbClr val="E9EEF4"/>
+                    </a:solidFill>
+                  </a:tcPr>
+                </a:tc>
+                <a:tc>
+                  <a:txBody>
+                    <a:bodyPr/>
+                    <a:lstStyle/>
+                    <a:p>
+                      <a:pPr algn="ctr"/>
+                      <a:r>
+                        <a:rPr sz="1500">
+                          <a:solidFill>
+                            <a:srgbClr val="222222"/>
+                          </a:solidFill>
+                        </a:rPr>
+                        <a:t>+12.5 pp</a:t>
+                      </a:r>
+                    </a:p>
+                  </a:txBody>
+                  <a:tcPr>
+                    <a:solidFill>
+                      <a:srgbClr val="E9EEF4"/>
+                    </a:solidFill>
+                  </a:tcPr>
+                </a:tc>
+              </a:tr>
+              <a:tr h="457200">
+                <a:tc>
+                  <a:txBody>
+                    <a:bodyPr/>
+                    <a:lstStyle/>
+                    <a:p>
+                      <a:pPr algn="ctr"/>
+                      <a:r>
+                        <a:rPr sz="1500">
+                          <a:solidFill>
+                            <a:srgbClr val="222222"/>
+                          </a:solidFill>
+                        </a:rPr>
+                        <a:t>MRR</a:t>
+                      </a:r>
+                    </a:p>
+                  </a:txBody>
+                  <a:tcPr>
+                    <a:solidFill>
+                      <a:srgbClr val="FFFFFF"/>
+                    </a:solidFill>
+                  </a:tcPr>
+                </a:tc>
+                <a:tc>
+                  <a:txBody>
+                    <a:bodyPr/>
+                    <a:lstStyle/>
+                    <a:p>
+                      <a:pPr algn="ctr"/>
+                      <a:r>
+                        <a:rPr sz="1500">
+                          <a:solidFill>
+                            <a:srgbClr val="222222"/>
+                          </a:solidFill>
+                        </a:rPr>
+                        <a:t>0.250</a:t>
+                      </a:r>
+                    </a:p>
+                  </a:txBody>
+                  <a:tcPr>
+                    <a:solidFill>
+                      <a:srgbClr val="FFFFFF"/>
+                    </a:solidFill>
+                  </a:tcPr>
+                </a:tc>
+                <a:tc>
+                  <a:txBody>
+                    <a:bodyPr/>
+                    <a:lstStyle/>
+                    <a:p>
+                      <a:pPr algn="ctr"/>
+                      <a:r>
+                        <a:rPr sz="1500">
+                          <a:solidFill>
+                            <a:srgbClr val="222222"/>
+                          </a:solidFill>
+                        </a:rPr>
+                        <a:t>0.219</a:t>
+                      </a:r>
+                    </a:p>
+                  </a:txBody>
+                  <a:tcPr>
+                    <a:solidFill>
+                      <a:srgbClr val="FFFFFF"/>
+                    </a:solidFill>
+                  </a:tcPr>
+                </a:tc>
+                <a:tc>
+                  <a:txBody>
+                    <a:bodyPr/>
+                    <a:lstStyle/>
+                    <a:p>
+                      <a:pPr algn="ctr"/>
+                      <a:r>
+                        <a:rPr sz="1500">
+                          <a:solidFill>
+                            <a:srgbClr val="222222"/>
+                          </a:solidFill>
+                        </a:rPr>
+                        <a:t>−0.031</a:t>
+                      </a:r>
+                    </a:p>
+                  </a:txBody>
+                  <a:tcPr>
+                    <a:solidFill>
+                      <a:srgbClr val="FFFFFF"/>
+                    </a:solidFill>
+                  </a:tcPr>
+                </a:tc>
+              </a:tr>
+              <a:tr h="457200">
+                <a:tc>
+                  <a:txBody>
+                    <a:bodyPr/>
+                    <a:lstStyle/>
+                    <a:p>
+                      <a:pPr algn="ctr"/>
+                      <a:r>
+                        <a:rPr sz="1500">
+                          <a:solidFill>
+                            <a:srgbClr val="222222"/>
+                          </a:solidFill>
+                        </a:rPr>
+                        <a:t>Correctness (mean)</a:t>
+                      </a:r>
+                    </a:p>
+                  </a:txBody>
+                  <a:tcPr>
+                    <a:solidFill>
+                      <a:srgbClr val="E9EEF4"/>
+                    </a:solidFill>
+                  </a:tcPr>
+                </a:tc>
+                <a:tc>
+                  <a:txBody>
+                    <a:bodyPr/>
+                    <a:lstStyle/>
+                    <a:p>
+                      <a:pPr algn="ctr"/>
+                      <a:r>
+                        <a:rPr sz="1500">
+                          <a:solidFill>
+                            <a:srgbClr val="222222"/>
+                          </a:solidFill>
+                        </a:rPr>
+                        <a:t>1.27</a:t>
+                      </a:r>
+                    </a:p>
+                  </a:txBody>
+                  <a:tcPr>
+                    <a:solidFill>
+                      <a:srgbClr val="E9EEF4"/>
+                    </a:solidFill>
+                  </a:tcPr>
+                </a:tc>
+                <a:tc>
+                  <a:txBody>
+                    <a:bodyPr/>
+                    <a:lstStyle/>
+                    <a:p>
+                      <a:pPr algn="ctr"/>
+                      <a:r>
+                        <a:rPr sz="1500">
+                          <a:solidFill>
+                            <a:srgbClr val="222222"/>
+                          </a:solidFill>
+                        </a:rPr>
+                        <a:t>1.40</a:t>
+                      </a:r>
+                    </a:p>
+                  </a:txBody>
+                  <a:tcPr>
+                    <a:solidFill>
+                      <a:srgbClr val="E9EEF4"/>
+                    </a:solidFill>
+                  </a:tcPr>
+                </a:tc>
+                <a:tc>
+                  <a:txBody>
+                    <a:bodyPr/>
+                    <a:lstStyle/>
+                    <a:p>
+                      <a:pPr algn="ctr"/>
+                      <a:r>
+                        <a:rPr sz="1500">
+                          <a:solidFill>
+                            <a:srgbClr val="222222"/>
+                          </a:solidFill>
+                        </a:rPr>
+                        <a:t>+0.13</a:t>
+                      </a:r>
+                    </a:p>
+                  </a:txBody>
+                  <a:tcPr>
+                    <a:solidFill>
+                      <a:srgbClr val="E9EEF4"/>
+                    </a:solidFill>
+                  </a:tcPr>
+                </a:tc>
+              </a:tr>
+              <a:tr h="457200">
+                <a:tc>
+                  <a:txBody>
+                    <a:bodyPr/>
+                    <a:lstStyle/>
+                    <a:p>
+                      <a:pPr algn="ctr"/>
+                      <a:r>
+                        <a:rPr sz="1500">
+                          <a:solidFill>
+                            <a:srgbClr val="222222"/>
+                          </a:solidFill>
+                        </a:rPr>
+                        <a:t>Faithfulness (mean)</a:t>
+                      </a:r>
+                    </a:p>
+                  </a:txBody>
+                  <a:tcPr>
+                    <a:solidFill>
+                      <a:srgbClr val="FFFFFF"/>
+                    </a:solidFill>
+                  </a:tcPr>
+                </a:tc>
+                <a:tc>
+                  <a:txBody>
+                    <a:bodyPr/>
+                    <a:lstStyle/>
+                    <a:p>
+                      <a:pPr algn="ctr"/>
+                      <a:r>
+                        <a:rPr sz="1500">
+                          <a:solidFill>
+                            <a:srgbClr val="222222"/>
+                          </a:solidFill>
+                        </a:rPr>
+                        <a:t>1.73</a:t>
+                      </a:r>
+                    </a:p>
+                  </a:txBody>
+                  <a:tcPr>
+                    <a:solidFill>
+                      <a:srgbClr val="FFFFFF"/>
+                    </a:solidFill>
+                  </a:tcPr>
+                </a:tc>
+                <a:tc>
+                  <a:txBody>
+                    <a:bodyPr/>
+                    <a:lstStyle/>
+                    <a:p>
+                      <a:pPr algn="ctr"/>
+                      <a:r>
+                        <a:rPr sz="1500">
+                          <a:solidFill>
+                            <a:srgbClr val="222222"/>
+                          </a:solidFill>
+                        </a:rPr>
+                        <a:t>1.47</a:t>
+                      </a:r>
+                    </a:p>
+                  </a:txBody>
+                  <a:tcPr>
+                    <a:solidFill>
+                      <a:srgbClr val="FFFFFF"/>
+                    </a:solidFill>
+                  </a:tcPr>
+                </a:tc>
+                <a:tc>
+                  <a:txBody>
+                    <a:bodyPr/>
+                    <a:lstStyle/>
+                    <a:p>
+                      <a:pPr algn="ctr"/>
+                      <a:r>
+                        <a:rPr sz="1500">
+                          <a:solidFill>
+                            <a:srgbClr val="222222"/>
+                          </a:solidFill>
+                        </a:rPr>
+                        <a:t>−0.26</a:t>
+                      </a:r>
+                    </a:p>
+                  </a:txBody>
+                  <a:tcPr>
+                    <a:solidFill>
+                      <a:srgbClr val="FFFFFF"/>
+                    </a:solidFill>
+                  </a:tcPr>
+                </a:tc>
+              </a:tr>
+              <a:tr h="457200">
+                <a:tc>
+                  <a:txBody>
+                    <a:bodyPr/>
+                    <a:lstStyle/>
+                    <a:p>
+                      <a:pPr algn="ctr"/>
+                      <a:r>
+                        <a:rPr sz="1500">
+                          <a:solidFill>
+                            <a:srgbClr val="222222"/>
+                          </a:solidFill>
+                        </a:rPr>
+                        <a:t>Citation accuracy (mean)</a:t>
+                      </a:r>
+                    </a:p>
+                  </a:txBody>
+                  <a:tcPr>
+                    <a:solidFill>
+                      <a:srgbClr val="E9EEF4"/>
+                    </a:solidFill>
+                  </a:tcPr>
+                </a:tc>
+                <a:tc>
+                  <a:txBody>
+                    <a:bodyPr/>
+                    <a:lstStyle/>
+                    <a:p>
+                      <a:pPr algn="ctr"/>
+                      <a:r>
+                        <a:rPr sz="1500">
+                          <a:solidFill>
+                            <a:srgbClr val="222222"/>
+                          </a:solidFill>
+                        </a:rPr>
+                        <a:t>1.80</a:t>
+                      </a:r>
+                    </a:p>
+                  </a:txBody>
+                  <a:tcPr>
+                    <a:solidFill>
+                      <a:srgbClr val="E9EEF4"/>
+                    </a:solidFill>
+                  </a:tcPr>
+                </a:tc>
+                <a:tc>
+                  <a:txBody>
+                    <a:bodyPr/>
+                    <a:lstStyle/>
+                    <a:p>
+                      <a:pPr algn="ctr"/>
+                      <a:r>
+                        <a:rPr sz="1500">
+                          <a:solidFill>
+                            <a:srgbClr val="222222"/>
+                          </a:solidFill>
+                        </a:rPr>
+                        <a:t>1.80</a:t>
+                      </a:r>
+                    </a:p>
+                  </a:txBody>
+                  <a:tcPr>
+                    <a:solidFill>
+                      <a:srgbClr val="E9EEF4"/>
+                    </a:solidFill>
+                  </a:tcPr>
+                </a:tc>
+                <a:tc>
+                  <a:txBody>
+                    <a:bodyPr/>
+                    <a:lstStyle/>
+                    <a:p>
+                      <a:pPr algn="ctr"/>
+                      <a:r>
+                        <a:rPr sz="1500">
+                          <a:solidFill>
+                            <a:srgbClr val="222222"/>
+                          </a:solidFill>
+                        </a:rPr>
+                        <a:t>0.00</a:t>
+                      </a:r>
+                    </a:p>
+                  </a:txBody>
+                  <a:tcPr>
+                    <a:solidFill>
+                      <a:srgbClr val="E9EEF4"/>
+                    </a:solidFill>
+                  </a:tcPr>
+                </a:tc>
+              </a:tr>
+            </a:tbl>
+          </a:graphicData>
+        </a:graphic>
+      </p:graphicFrame>
+      <p:sp>
+        <p:nvSpPr>
+          <p:cNvPr id="7" name="TextBox 6"/>
+          <p:cNvSpPr txBox="1"/>
+          <p:nvPr/>
+        </p:nvSpPr>
+        <p:spPr>
+          <a:xfrm>
+            <a:off x="640080" y="4892040"/>
+            <a:ext cx="10881360" cy="1554480"/>
           </a:xfrm>
           <a:prstGeom prst="rect">
             <a:avLst/>
@@ -3392,20 +4318,20 @@
               </a:spcAft>
             </a:pPr>
             <a:r>
-              <a:rPr b="1" sz="1700">
-                <a:solidFill>
-                  <a:srgbClr val="1F3A5F"/>
-                </a:solidFill>
-              </a:rPr>
-              <a:t>▪  Limitations — </a:t>
-            </a:r>
-            <a:r>
-              <a:rPr sz="1700">
+              <a:rPr b="1" sz="1500">
+                <a:solidFill>
+                  <a:srgbClr val="B2691F"/>
+                </a:solidFill>
+              </a:rPr>
+              <a:t>▪  What changed — </a:t>
+            </a:r>
+            <a:r>
+              <a:rPr sz="1500">
                 <a:solidFill>
                   <a:srgbClr val="222222"/>
                 </a:solidFill>
               </a:rPr>
-              <a:t>small labelled eval set (8/15); known corpus gaps (Parent Relief/WMCR); keyword-based intent router can misfire; shortlist reasons aren't cross-checked against the profile; MRR regressed under hybrid.</a:t>
+              <a:t>added BM25 keyword search fused with dense retrieval via Reciprocal Rank Fusion, to catch distinctive keywords/amounts dense embeddings dilute.</a:t>
             </a:r>
           </a:p>
           <a:p>
@@ -3418,106 +4344,20 @@
               </a:spcAft>
             </a:pPr>
             <a:r>
-              <a:rPr b="1" sz="1700">
-                <a:solidFill>
-                  <a:srgbClr val="1F3A5F"/>
-                </a:solidFill>
-              </a:rPr>
-              <a:t>▪  Lesson 1 — </a:t>
-            </a:r>
-            <a:r>
-              <a:rPr sz="1700">
+              <a:rPr b="1" sz="1500">
+                <a:solidFill>
+                  <a:srgbClr val="B2691F"/>
+                </a:solidFill>
+              </a:rPr>
+              <a:t>▪  Trade-off — </a:t>
+            </a:r>
+            <a:r>
+              <a:rPr sz="1500">
                 <a:solidFill>
                   <a:srgbClr val="222222"/>
                 </a:solidFill>
               </a:rPr>
-              <a:t>hybrid retrieval trades some ranking precision and answer-faithfulness for meaningfully better coverage — worth it here, but the grounding gap needs a fix.</a:t>
-            </a:r>
-          </a:p>
-          <a:p>
-            <a:pPr>
-              <a:lnSpc>
-                <a:spcPct val="115000"/>
-              </a:lnSpc>
-              <a:spcAft>
-                <a:spcPts val="1200"/>
-              </a:spcAft>
-            </a:pPr>
-            <a:r>
-              <a:rPr b="1" sz="1700">
-                <a:solidFill>
-                  <a:srgbClr val="1F3A5F"/>
-                </a:solidFill>
-              </a:rPr>
-              <a:t>▪  Lesson 2 — </a:t>
-            </a:r>
-            <a:r>
-              <a:rPr sz="1700">
-                <a:solidFill>
-                  <a:srgbClr val="222222"/>
-                </a:solidFill>
-              </a:rPr>
-              <a:t>deriving safety-critical logic (the eligible/unclear bucket) in code from structured fields, rather than trusting the model's own prose, caught bucket errors but not text-level contradictions — both layers need validation.</a:t>
-            </a:r>
-          </a:p>
-          <a:p>
-            <a:pPr>
-              <a:lnSpc>
-                <a:spcPct val="115000"/>
-              </a:lnSpc>
-              <a:spcAft>
-                <a:spcPts val="1200"/>
-              </a:spcAft>
-            </a:pPr>
-            <a:r>
-              <a:rPr b="1" sz="1700">
-                <a:solidFill>
-                  <a:srgbClr val="1F3A5F"/>
-                </a:solidFill>
-              </a:rPr>
-              <a:t>▪  Lesson 3 — </a:t>
-            </a:r>
-            <a:r>
-              <a:rPr sz="1700">
-                <a:solidFill>
-                  <a:srgbClr val="222222"/>
-                </a:solidFill>
-              </a:rPr>
-              <a:t>small, well-labelled failure cases taught us more than the aggregate metrics alone — each failure pointed to a specific, fixable cause (corpus gap, router heuristic, or missing consistency check).</a:t>
-            </a:r>
-          </a:p>
-        </p:txBody>
-      </p:sp>
-      <p:sp>
-        <p:nvSpPr>
-          <p:cNvPr id="6" name="TextBox 5"/>
-          <p:cNvSpPr txBox="1"/>
-          <p:nvPr/>
-        </p:nvSpPr>
-        <p:spPr>
-          <a:xfrm>
-            <a:off x="9692640" y="6446520"/>
-            <a:ext cx="2286000" cy="320040"/>
-          </a:xfrm>
-          <a:prstGeom prst="rect">
-            <a:avLst/>
-          </a:prstGeom>
-          <a:noFill/>
-        </p:spPr>
-        <p:txBody>
-          <a:bodyPr wrap="none">
-            <a:spAutoFit/>
-          </a:bodyPr>
-          <a:lstStyle/>
-          <a:p>
-            <a:pPr algn="r"/>
-            <a:r>
-              <a:rPr sz="1100" i="1">
-                <a:solidFill>
-                  <a:srgbClr val="6B6B6B"/>
-                </a:solidFill>
-              </a:rPr>
-              <a:t>Presented by: [Name]</a:t>
+              <a:t>hybrid retrieves the right evidence more often, but is less strictly grounded when it does answer — and ranks correct hits slightly later on average.</a:t>
             </a:r>
           </a:p>
         </p:txBody>
@@ -3531,6 +4371,600 @@
 </file>
 
 <file path=ppt/slides/slide11.xml><?xml version="1.0" encoding="utf-8"?>
+<p:sld xmlns:a="http://schemas.openxmlformats.org/drawingml/2006/main" xmlns:p="http://schemas.openxmlformats.org/presentationml/2006/main" xmlns:r="http://schemas.openxmlformats.org/officeDocument/2006/relationships">
+  <p:cSld>
+    <p:bg>
+      <p:bgPr>
+        <a:solidFill>
+          <a:srgbClr val="FFFFFF"/>
+        </a:solidFill>
+        <a:effectLst/>
+      </p:bgPr>
+    </p:bg>
+    <p:spTree>
+      <p:nvGrpSpPr>
+        <p:cNvPr id="1" name=""/>
+        <p:cNvGrpSpPr/>
+        <p:nvPr/>
+      </p:nvGrpSpPr>
+      <p:grpSpPr/>
+      <p:sp>
+        <p:nvSpPr>
+          <p:cNvPr id="2" name="Rectangle 1"/>
+          <p:cNvSpPr/>
+          <p:nvPr/>
+        </p:nvSpPr>
+        <p:spPr>
+          <a:xfrm>
+            <a:off x="0" y="0"/>
+            <a:ext cx="12191695" cy="1051560"/>
+          </a:xfrm>
+          <a:prstGeom prst="rect">
+            <a:avLst/>
+          </a:prstGeom>
+          <a:solidFill>
+            <a:srgbClr val="B2691F"/>
+          </a:solidFill>
+          <a:ln>
+            <a:noFill/>
+          </a:ln>
+          <a:effectLst/>
+        </p:spPr>
+        <p:style>
+          <a:lnRef idx="1">
+            <a:schemeClr val="accent1"/>
+          </a:lnRef>
+          <a:fillRef idx="3">
+            <a:schemeClr val="accent1"/>
+          </a:fillRef>
+          <a:effectRef idx="2">
+            <a:schemeClr val="accent1"/>
+          </a:effectRef>
+          <a:fontRef idx="minor">
+            <a:schemeClr val="lt1"/>
+          </a:fontRef>
+        </p:style>
+        <p:txBody>
+          <a:bodyPr rtlCol="0" anchor="ctr"/>
+          <a:lstStyle/>
+          <a:p>
+            <a:pPr algn="ctr"/>
+          </a:p>
+        </p:txBody>
+      </p:sp>
+      <p:sp>
+        <p:nvSpPr>
+          <p:cNvPr id="3" name="TextBox 2"/>
+          <p:cNvSpPr txBox="1"/>
+          <p:nvPr/>
+        </p:nvSpPr>
+        <p:spPr>
+          <a:xfrm>
+            <a:off x="502920" y="109728"/>
+            <a:ext cx="10515600" cy="320040"/>
+          </a:xfrm>
+          <a:prstGeom prst="rect">
+            <a:avLst/>
+          </a:prstGeom>
+          <a:noFill/>
+        </p:spPr>
+        <p:txBody>
+          <a:bodyPr wrap="none">
+            <a:spAutoFit/>
+          </a:bodyPr>
+          <a:lstStyle/>
+          <a:p>
+            <a:r>
+              <a:rPr sz="1200" b="1">
+                <a:solidFill>
+                  <a:srgbClr val="B9CCE0"/>
+                </a:solidFill>
+              </a:rPr>
+              <a:t>PART 4 OF 4 · EVALUATION &amp; TESTING · ~1 MIN</a:t>
+            </a:r>
+          </a:p>
+        </p:txBody>
+      </p:sp>
+      <p:sp>
+        <p:nvSpPr>
+          <p:cNvPr id="4" name="TextBox 3"/>
+          <p:cNvSpPr txBox="1"/>
+          <p:nvPr/>
+        </p:nvSpPr>
+        <p:spPr>
+          <a:xfrm>
+            <a:off x="502920" y="384048"/>
+            <a:ext cx="10972800" cy="640080"/>
+          </a:xfrm>
+          <a:prstGeom prst="rect">
+            <a:avLst/>
+          </a:prstGeom>
+          <a:noFill/>
+        </p:spPr>
+        <p:txBody>
+          <a:bodyPr wrap="none">
+            <a:spAutoFit/>
+          </a:bodyPr>
+          <a:lstStyle/>
+          <a:p>
+            <a:r>
+              <a:rPr sz="2600" b="1">
+                <a:solidFill>
+                  <a:srgbClr val="FFFFFF"/>
+                </a:solidFill>
+              </a:rPr>
+              <a:t>Failure Case Analysis</a:t>
+            </a:r>
+          </a:p>
+        </p:txBody>
+      </p:sp>
+      <p:sp>
+        <p:nvSpPr>
+          <p:cNvPr id="5" name="TextBox 4"/>
+          <p:cNvSpPr txBox="1"/>
+          <p:nvPr/>
+        </p:nvSpPr>
+        <p:spPr>
+          <a:xfrm>
+            <a:off x="9326880" y="6446520"/>
+            <a:ext cx="2651760" cy="320040"/>
+          </a:xfrm>
+          <a:prstGeom prst="rect">
+            <a:avLst/>
+          </a:prstGeom>
+          <a:noFill/>
+        </p:spPr>
+        <p:txBody>
+          <a:bodyPr wrap="none">
+            <a:spAutoFit/>
+          </a:bodyPr>
+          <a:lstStyle/>
+          <a:p>
+            <a:pPr algn="r"/>
+            <a:r>
+              <a:rPr sz="1100" b="1" i="0">
+                <a:solidFill>
+                  <a:srgbClr val="B2691F"/>
+                </a:solidFill>
+              </a:rPr>
+              <a:t>● Presenter: [Name 4]</a:t>
+            </a:r>
+          </a:p>
+        </p:txBody>
+      </p:sp>
+      <p:sp>
+        <p:nvSpPr>
+          <p:cNvPr id="6" name="TextBox 5"/>
+          <p:cNvSpPr txBox="1"/>
+          <p:nvPr/>
+        </p:nvSpPr>
+        <p:spPr>
+          <a:xfrm>
+            <a:off x="640080" y="1463040"/>
+            <a:ext cx="10881360" cy="4846320"/>
+          </a:xfrm>
+          <a:prstGeom prst="rect">
+            <a:avLst/>
+          </a:prstGeom>
+          <a:noFill/>
+        </p:spPr>
+        <p:txBody>
+          <a:bodyPr wrap="square">
+            <a:spAutoFit/>
+          </a:bodyPr>
+          <a:lstStyle/>
+          <a:p>
+            <a:pPr>
+              <a:lnSpc>
+                <a:spcPct val="115000"/>
+              </a:lnSpc>
+              <a:spcAft>
+                <a:spcPts val="1200"/>
+              </a:spcAft>
+            </a:pPr>
+            <a:r>
+              <a:rPr b="1" sz="1700">
+                <a:solidFill>
+                  <a:srgbClr val="B2691F"/>
+                </a:solidFill>
+              </a:rPr>
+              <a:t>▪  PR3 — citizenship hallucination: </a:t>
+            </a:r>
+            <a:r>
+              <a:rPr sz="1700">
+                <a:solidFill>
+                  <a:srgbClr val="222222"/>
+                </a:solidFill>
+              </a:rPr>
+              <a:t>hybrid's reason text asserted “Singapore Citizen” for a profile explicitly marked PR — a generation/grounding failure, since bucket logic only reads structured conditions.</a:t>
+            </a:r>
+          </a:p>
+          <a:p>
+            <a:pPr>
+              <a:lnSpc>
+                <a:spcPct val="115000"/>
+              </a:lnSpc>
+              <a:spcAft>
+                <a:spcPts val="1200"/>
+              </a:spcAft>
+            </a:pPr>
+            <a:r>
+              <a:rPr b="1" sz="1700">
+                <a:solidFill>
+                  <a:srgbClr val="B2691F"/>
+                </a:solidFill>
+              </a:rPr>
+              <a:t>▪  P1/P2 — paraphrase misrouting: </a:t>
+            </a:r>
+            <a:r>
+              <a:rPr sz="1700">
+                <a:solidFill>
+                  <a:srgbClr val="222222"/>
+                </a:solidFill>
+              </a:rPr>
+              <a:t>“my mother” / “working mum” tax questions were routed into the eligibility-shortlist path instead of IRAS Parent Relief / WMCR — a corpus gap plus an over-eager keyword router.</a:t>
+            </a:r>
+          </a:p>
+          <a:p>
+            <a:pPr>
+              <a:lnSpc>
+                <a:spcPct val="115000"/>
+              </a:lnSpc>
+              <a:spcAft>
+                <a:spcPts val="1200"/>
+              </a:spcAft>
+            </a:pPr>
+            <a:r>
+              <a:rPr b="1" sz="1700">
+                <a:solidFill>
+                  <a:srgbClr val="B2691F"/>
+                </a:solidFill>
+              </a:rPr>
+              <a:t>▪  F2 — corpus-gap false positive: </a:t>
+            </a:r>
+            <a:r>
+              <a:rPr sz="1700">
+                <a:solidFill>
+                  <a:srgbClr val="222222"/>
+                </a:solidFill>
+              </a:rPr>
+              <a:t>hybrid stated the $80,000 tax relief cap from passages that only mention it in passing, versus dense's safer abstention.</a:t>
+            </a:r>
+          </a:p>
+          <a:p>
+            <a:pPr>
+              <a:lnSpc>
+                <a:spcPct val="115000"/>
+              </a:lnSpc>
+              <a:spcAft>
+                <a:spcPts val="1200"/>
+              </a:spcAft>
+            </a:pPr>
+            <a:r>
+              <a:rPr b="1" sz="1700">
+                <a:solidFill>
+                  <a:srgbClr val="B2691F"/>
+                </a:solidFill>
+              </a:rPr>
+              <a:t>▪  M2 — under-grounded synthesis: </a:t>
+            </a:r>
+            <a:r>
+              <a:rPr sz="1700">
+                <a:solidFill>
+                  <a:srgbClr val="222222"/>
+                </a:solidFill>
+              </a:rPr>
+              <a:t>hybrid generated a plausible but only partially correct multi-document answer where dense abstained cleanly instead.</a:t>
+            </a:r>
+          </a:p>
+        </p:txBody>
+      </p:sp>
+    </p:spTree>
+  </p:cSld>
+  <p:clrMapOvr>
+    <a:masterClrMapping/>
+  </p:clrMapOvr>
+</p:sld>
+</file>
+
+<file path=ppt/slides/slide12.xml><?xml version="1.0" encoding="utf-8"?>
+<p:sld xmlns:a="http://schemas.openxmlformats.org/drawingml/2006/main" xmlns:p="http://schemas.openxmlformats.org/presentationml/2006/main" xmlns:r="http://schemas.openxmlformats.org/officeDocument/2006/relationships">
+  <p:cSld>
+    <p:bg>
+      <p:bgPr>
+        <a:solidFill>
+          <a:srgbClr val="FFFFFF"/>
+        </a:solidFill>
+        <a:effectLst/>
+      </p:bgPr>
+    </p:bg>
+    <p:spTree>
+      <p:nvGrpSpPr>
+        <p:cNvPr id="1" name=""/>
+        <p:cNvGrpSpPr/>
+        <p:nvPr/>
+      </p:nvGrpSpPr>
+      <p:grpSpPr/>
+      <p:sp>
+        <p:nvSpPr>
+          <p:cNvPr id="2" name="Rectangle 1"/>
+          <p:cNvSpPr/>
+          <p:nvPr/>
+        </p:nvSpPr>
+        <p:spPr>
+          <a:xfrm>
+            <a:off x="0" y="0"/>
+            <a:ext cx="12191695" cy="1051560"/>
+          </a:xfrm>
+          <a:prstGeom prst="rect">
+            <a:avLst/>
+          </a:prstGeom>
+          <a:solidFill>
+            <a:srgbClr val="B2691F"/>
+          </a:solidFill>
+          <a:ln>
+            <a:noFill/>
+          </a:ln>
+          <a:effectLst/>
+        </p:spPr>
+        <p:style>
+          <a:lnRef idx="1">
+            <a:schemeClr val="accent1"/>
+          </a:lnRef>
+          <a:fillRef idx="3">
+            <a:schemeClr val="accent1"/>
+          </a:fillRef>
+          <a:effectRef idx="2">
+            <a:schemeClr val="accent1"/>
+          </a:effectRef>
+          <a:fontRef idx="minor">
+            <a:schemeClr val="lt1"/>
+          </a:fontRef>
+        </p:style>
+        <p:txBody>
+          <a:bodyPr rtlCol="0" anchor="ctr"/>
+          <a:lstStyle/>
+          <a:p>
+            <a:pPr algn="ctr"/>
+          </a:p>
+        </p:txBody>
+      </p:sp>
+      <p:sp>
+        <p:nvSpPr>
+          <p:cNvPr id="3" name="TextBox 2"/>
+          <p:cNvSpPr txBox="1"/>
+          <p:nvPr/>
+        </p:nvSpPr>
+        <p:spPr>
+          <a:xfrm>
+            <a:off x="502920" y="109728"/>
+            <a:ext cx="10515600" cy="320040"/>
+          </a:xfrm>
+          <a:prstGeom prst="rect">
+            <a:avLst/>
+          </a:prstGeom>
+          <a:noFill/>
+        </p:spPr>
+        <p:txBody>
+          <a:bodyPr wrap="none">
+            <a:spAutoFit/>
+          </a:bodyPr>
+          <a:lstStyle/>
+          <a:p>
+            <a:r>
+              <a:rPr sz="1200" b="1">
+                <a:solidFill>
+                  <a:srgbClr val="B9CCE0"/>
+                </a:solidFill>
+              </a:rPr>
+              <a:t>PART 4 OF 4 · EVALUATION &amp; TESTING · ~1–2 MIN</a:t>
+            </a:r>
+          </a:p>
+        </p:txBody>
+      </p:sp>
+      <p:sp>
+        <p:nvSpPr>
+          <p:cNvPr id="4" name="TextBox 3"/>
+          <p:cNvSpPr txBox="1"/>
+          <p:nvPr/>
+        </p:nvSpPr>
+        <p:spPr>
+          <a:xfrm>
+            <a:off x="502920" y="384048"/>
+            <a:ext cx="10972800" cy="640080"/>
+          </a:xfrm>
+          <a:prstGeom prst="rect">
+            <a:avLst/>
+          </a:prstGeom>
+          <a:noFill/>
+        </p:spPr>
+        <p:txBody>
+          <a:bodyPr wrap="none">
+            <a:spAutoFit/>
+          </a:bodyPr>
+          <a:lstStyle/>
+          <a:p>
+            <a:r>
+              <a:rPr sz="2600" b="1">
+                <a:solidFill>
+                  <a:srgbClr val="FFFFFF"/>
+                </a:solidFill>
+              </a:rPr>
+              <a:t>Limitations &amp; Lessons Learned</a:t>
+            </a:r>
+          </a:p>
+        </p:txBody>
+      </p:sp>
+      <p:sp>
+        <p:nvSpPr>
+          <p:cNvPr id="5" name="TextBox 4"/>
+          <p:cNvSpPr txBox="1"/>
+          <p:nvPr/>
+        </p:nvSpPr>
+        <p:spPr>
+          <a:xfrm>
+            <a:off x="9326880" y="6446520"/>
+            <a:ext cx="2651760" cy="320040"/>
+          </a:xfrm>
+          <a:prstGeom prst="rect">
+            <a:avLst/>
+          </a:prstGeom>
+          <a:noFill/>
+        </p:spPr>
+        <p:txBody>
+          <a:bodyPr wrap="none">
+            <a:spAutoFit/>
+          </a:bodyPr>
+          <a:lstStyle/>
+          <a:p>
+            <a:pPr algn="r"/>
+            <a:r>
+              <a:rPr sz="1100" b="1" i="0">
+                <a:solidFill>
+                  <a:srgbClr val="B2691F"/>
+                </a:solidFill>
+              </a:rPr>
+              <a:t>● Presenter: [Name 4]</a:t>
+            </a:r>
+          </a:p>
+        </p:txBody>
+      </p:sp>
+      <p:sp>
+        <p:nvSpPr>
+          <p:cNvPr id="6" name="TextBox 5"/>
+          <p:cNvSpPr txBox="1"/>
+          <p:nvPr/>
+        </p:nvSpPr>
+        <p:spPr>
+          <a:xfrm>
+            <a:off x="640080" y="1417320"/>
+            <a:ext cx="10881360" cy="4937760"/>
+          </a:xfrm>
+          <a:prstGeom prst="rect">
+            <a:avLst/>
+          </a:prstGeom>
+          <a:noFill/>
+        </p:spPr>
+        <p:txBody>
+          <a:bodyPr wrap="square">
+            <a:spAutoFit/>
+          </a:bodyPr>
+          <a:lstStyle/>
+          <a:p>
+            <a:pPr>
+              <a:lnSpc>
+                <a:spcPct val="115000"/>
+              </a:lnSpc>
+              <a:spcAft>
+                <a:spcPts val="1200"/>
+              </a:spcAft>
+            </a:pPr>
+            <a:r>
+              <a:rPr b="1" sz="1650">
+                <a:solidFill>
+                  <a:srgbClr val="B2691F"/>
+                </a:solidFill>
+              </a:rPr>
+              <a:t>▪  Limitations — </a:t>
+            </a:r>
+            <a:r>
+              <a:rPr sz="1650">
+                <a:solidFill>
+                  <a:srgbClr val="222222"/>
+                </a:solidFill>
+              </a:rPr>
+              <a:t>small labelled eval set (8/15); known corpus gaps (Parent Relief/WMCR); keyword-based intent router can misfire; shortlist reasons aren't cross-checked against the profile; MRR regressed under hybrid.</a:t>
+            </a:r>
+          </a:p>
+          <a:p>
+            <a:pPr>
+              <a:lnSpc>
+                <a:spcPct val="115000"/>
+              </a:lnSpc>
+              <a:spcAft>
+                <a:spcPts val="1200"/>
+              </a:spcAft>
+            </a:pPr>
+            <a:r>
+              <a:rPr b="1" sz="1650">
+                <a:solidFill>
+                  <a:srgbClr val="B2691F"/>
+                </a:solidFill>
+              </a:rPr>
+              <a:t>▪  Lesson 1 — </a:t>
+            </a:r>
+            <a:r>
+              <a:rPr sz="1650">
+                <a:solidFill>
+                  <a:srgbClr val="222222"/>
+                </a:solidFill>
+              </a:rPr>
+              <a:t>hybrid retrieval trades some ranking precision and answer-faithfulness for meaningfully better coverage — worth it here, but the grounding gap needs a fix.</a:t>
+            </a:r>
+          </a:p>
+          <a:p>
+            <a:pPr>
+              <a:lnSpc>
+                <a:spcPct val="115000"/>
+              </a:lnSpc>
+              <a:spcAft>
+                <a:spcPts val="1200"/>
+              </a:spcAft>
+            </a:pPr>
+            <a:r>
+              <a:rPr b="1" sz="1650">
+                <a:solidFill>
+                  <a:srgbClr val="B2691F"/>
+                </a:solidFill>
+              </a:rPr>
+              <a:t>▪  Lesson 2 — </a:t>
+            </a:r>
+            <a:r>
+              <a:rPr sz="1650">
+                <a:solidFill>
+                  <a:srgbClr val="222222"/>
+                </a:solidFill>
+              </a:rPr>
+              <a:t>deriving safety-critical logic (the eligible/unclear bucket) in code from structured fields, rather than trusting the model's own prose, caught bucket errors but not text-level contradictions — both layers need validation.</a:t>
+            </a:r>
+          </a:p>
+          <a:p>
+            <a:pPr>
+              <a:lnSpc>
+                <a:spcPct val="115000"/>
+              </a:lnSpc>
+              <a:spcAft>
+                <a:spcPts val="1200"/>
+              </a:spcAft>
+            </a:pPr>
+            <a:r>
+              <a:rPr b="1" sz="1650">
+                <a:solidFill>
+                  <a:srgbClr val="B2691F"/>
+                </a:solidFill>
+              </a:rPr>
+              <a:t>▪  Lesson 3 — </a:t>
+            </a:r>
+            <a:r>
+              <a:rPr sz="1650">
+                <a:solidFill>
+                  <a:srgbClr val="222222"/>
+                </a:solidFill>
+              </a:rPr>
+              <a:t>small, well-labelled failure cases taught us more than the aggregate metrics alone — each failure pointed to a specific, fixable cause (corpus gap, router heuristic, or missing consistency check).</a:t>
+            </a:r>
+          </a:p>
+        </p:txBody>
+      </p:sp>
+    </p:spTree>
+  </p:cSld>
+  <p:clrMapOvr>
+    <a:masterClrMapping/>
+  </p:clrMapOvr>
+</p:sld>
+</file>
+
+<file path=ppt/slides/slide13.xml><?xml version="1.0" encoding="utf-8"?>
 <p:sld xmlns:a="http://schemas.openxmlformats.org/drawingml/2006/main" xmlns:p="http://schemas.openxmlformats.org/presentationml/2006/main" xmlns:r="http://schemas.openxmlformats.org/officeDocument/2006/relationships">
   <p:cSld>
     <p:bg>
@@ -3590,7 +5024,7 @@
         <p:spPr>
           <a:xfrm>
             <a:off x="822960" y="1737360"/>
-            <a:ext cx="10332720" cy="3474720"/>
+            <a:ext cx="10332720" cy="3108960"/>
           </a:xfrm>
           <a:prstGeom prst="rect">
             <a:avLst/>
@@ -3687,8 +5121,8 @@
         </p:nvSpPr>
         <p:spPr>
           <a:xfrm>
-            <a:off x="822960" y="5669280"/>
-            <a:ext cx="10332720" cy="822960"/>
+            <a:off x="822960" y="5212080"/>
+            <a:ext cx="10332720" cy="548640"/>
           </a:xfrm>
           <a:prstGeom prst="rect">
             <a:avLst/>
@@ -3708,6 +5142,39 @@
                 </a:solidFill>
               </a:rPr>
               <a:t>Thank you — Questions?</a:t>
+            </a:r>
+          </a:p>
+        </p:txBody>
+      </p:sp>
+      <p:sp>
+        <p:nvSpPr>
+          <p:cNvPr id="5" name="TextBox 4"/>
+          <p:cNvSpPr txBox="1"/>
+          <p:nvPr/>
+        </p:nvSpPr>
+        <p:spPr>
+          <a:xfrm>
+            <a:off x="822960" y="5943600"/>
+            <a:ext cx="10332720" cy="548640"/>
+          </a:xfrm>
+          <a:prstGeom prst="rect">
+            <a:avLst/>
+          </a:prstGeom>
+          <a:noFill/>
+        </p:spPr>
+        <p:txBody>
+          <a:bodyPr wrap="none">
+            <a:spAutoFit/>
+          </a:bodyPr>
+          <a:lstStyle/>
+          <a:p>
+            <a:r>
+              <a:rPr sz="1200">
+                <a:solidFill>
+                  <a:srgbClr val="9BB0C8"/>
+                </a:solidFill>
+              </a:rPr>
+              <a:t>All group members: [Name 1] (DATA &amp; INGESTION) · [Name 2] (RETRIEVAL) · [Name 3] (GENERATION &amp; APPLICATION) · [Name 4] (EVALUATION &amp; TESTING)</a:t>
             </a:r>
           </a:p>
         </p:txBody>
@@ -3810,7 +5277,7 @@
                   <a:srgbClr val="B9CCE0"/>
                 </a:solidFill>
               </a:rPr>
-              <a:t>1 MIN</a:t>
+              <a:t>AGENDA · 10-MINUTE TALK, 4 PRESENTERS</a:t>
             </a:r>
           </a:p>
         </p:txBody>
@@ -3843,21 +5310,130 @@
                   <a:srgbClr val="FFFFFF"/>
                 </a:solidFill>
               </a:rPr>
-              <a:t>Problem &amp; Intended Users</a:t>
-            </a:r>
-          </a:p>
-        </p:txBody>
-      </p:sp>
-      <p:sp>
-        <p:nvSpPr>
-          <p:cNvPr id="5" name="TextBox 4"/>
+              <a:t>Presentation Roadmap</a:t>
+            </a:r>
+          </a:p>
+        </p:txBody>
+      </p:sp>
+      <p:sp>
+        <p:nvSpPr>
+          <p:cNvPr id="5" name="Rounded Rectangle 4"/>
+          <p:cNvSpPr/>
+          <p:nvPr/>
+        </p:nvSpPr>
+        <p:spPr>
+          <a:xfrm>
+            <a:off x="548640" y="1417320"/>
+            <a:ext cx="2606040" cy="4480560"/>
+          </a:xfrm>
+          <a:prstGeom prst="roundRect">
+            <a:avLst/>
+          </a:prstGeom>
+          <a:solidFill>
+            <a:srgbClr val="FFFFFF"/>
+          </a:solidFill>
+          <a:ln w="28575">
+            <a:solidFill>
+              <a:srgbClr val="2E7D5B"/>
+            </a:solidFill>
+          </a:ln>
+          <a:effectLst/>
+        </p:spPr>
+        <p:style>
+          <a:lnRef idx="1">
+            <a:schemeClr val="accent1"/>
+          </a:lnRef>
+          <a:fillRef idx="3">
+            <a:schemeClr val="accent1"/>
+          </a:fillRef>
+          <a:effectRef idx="2">
+            <a:schemeClr val="accent1"/>
+          </a:effectRef>
+          <a:fontRef idx="minor">
+            <a:schemeClr val="lt1"/>
+          </a:fontRef>
+        </p:style>
+        <p:txBody>
+          <a:bodyPr rtlCol="0" anchor="ctr"/>
+          <a:lstStyle/>
+          <a:p>
+            <a:pPr algn="ctr"/>
+          </a:p>
+        </p:txBody>
+      </p:sp>
+      <p:sp>
+        <p:nvSpPr>
+          <p:cNvPr id="6" name="Rounded Rectangle 5"/>
+          <p:cNvSpPr/>
+          <p:nvPr/>
+        </p:nvSpPr>
+        <p:spPr>
+          <a:xfrm>
+            <a:off x="548640" y="1417320"/>
+            <a:ext cx="2606040" cy="1051560"/>
+          </a:xfrm>
+          <a:prstGeom prst="roundRect">
+            <a:avLst/>
+          </a:prstGeom>
+          <a:solidFill>
+            <a:srgbClr val="2E7D5B"/>
+          </a:solidFill>
+          <a:ln>
+            <a:noFill/>
+          </a:ln>
+          <a:effectLst/>
+        </p:spPr>
+        <p:style>
+          <a:lnRef idx="1">
+            <a:schemeClr val="accent1"/>
+          </a:lnRef>
+          <a:fillRef idx="3">
+            <a:schemeClr val="accent1"/>
+          </a:fillRef>
+          <a:effectRef idx="2">
+            <a:schemeClr val="accent1"/>
+          </a:effectRef>
+          <a:fontRef idx="minor">
+            <a:schemeClr val="lt1"/>
+          </a:fontRef>
+        </p:style>
+        <p:txBody>
+          <a:bodyPr rtlCol="0" anchor="ctr" wrap="square"/>
+          <a:lstStyle/>
+          <a:p>
+            <a:pPr algn="ctr"/>
+            <a:r>
+              <a:rPr sz="1500" b="1">
+                <a:solidFill>
+                  <a:srgbClr val="FFFFFF"/>
+                </a:solidFill>
+              </a:rPr>
+              <a:t>PART 1</a:t>
+            </a:r>
+          </a:p>
+          <a:p>
+            <a:pPr algn="ctr"/>
+            <a:r>
+              <a:rPr sz="1100" b="1">
+                <a:solidFill>
+                  <a:srgbClr val="FFFFFF"/>
+                </a:solidFill>
+              </a:rPr>
+              <a:t>DATA &amp; INGESTION</a:t>
+            </a:r>
+          </a:p>
+        </p:txBody>
+      </p:sp>
+      <p:sp>
+        <p:nvSpPr>
+          <p:cNvPr id="7" name="TextBox 6"/>
           <p:cNvSpPr txBox="1"/>
           <p:nvPr/>
         </p:nvSpPr>
         <p:spPr>
           <a:xfrm>
-            <a:off x="640080" y="1371600"/>
-            <a:ext cx="10881360" cy="4937760"/>
+            <a:off x="713232" y="2651760"/>
+            <a:ext cx="2276856" cy="2377440"/>
           </a:xfrm>
           <a:prstGeom prst="rect">
             <a:avLst/>
@@ -3871,120 +5447,46 @@
           <a:lstStyle/>
           <a:p>
             <a:pPr>
-              <a:lnSpc>
-                <a:spcPct val="115000"/>
-              </a:lnSpc>
               <a:spcAft>
-                <a:spcPts val="1200"/>
+                <a:spcPts val="800"/>
               </a:spcAft>
             </a:pPr>
             <a:r>
-              <a:rPr b="1" sz="1900">
-                <a:solidFill>
-                  <a:srgbClr val="1F3A5F"/>
-                </a:solidFill>
-              </a:rPr>
-              <a:t>▪  Who it's for — </a:t>
-            </a:r>
-            <a:r>
-              <a:rPr sz="1900">
+              <a:rPr sz="1300">
                 <a:solidFill>
                   <a:srgbClr val="222222"/>
                 </a:solidFill>
               </a:rPr>
-              <a:t>Singaporean residents — or people helping them, like social workers or family members — who need a plain-language answer to “Am I eligible for X?” or “How much is Y?”</a:t>
+              <a:t>▪  Problem &amp; Intended Users</a:t>
             </a:r>
           </a:p>
           <a:p>
             <a:pPr>
-              <a:lnSpc>
-                <a:spcPct val="115000"/>
-              </a:lnSpc>
               <a:spcAft>
-                <a:spcPts val="1200"/>
+                <a:spcPts val="800"/>
               </a:spcAft>
             </a:pPr>
             <a:r>
-              <a:rPr b="1" sz="1900">
-                <a:solidFill>
-                  <a:srgbClr val="1F3A5F"/>
-                </a:solidFill>
-              </a:rPr>
-              <a:t>▪  The problem — </a:t>
-            </a:r>
-            <a:r>
-              <a:rPr sz="1900">
+              <a:rPr sz="1300">
                 <a:solidFill>
                   <a:srgbClr val="222222"/>
                 </a:solidFill>
               </a:rPr>
-              <a:t>Eligibility rules and payout amounts are scattered across dozens of official PDFs, infographics and explainer videos. It's slow to search and easy to misread a condition.</a:t>
-            </a:r>
-          </a:p>
-          <a:p>
-            <a:pPr>
-              <a:lnSpc>
-                <a:spcPct val="115000"/>
-              </a:lnSpc>
-              <a:spcAft>
-                <a:spcPts val="1200"/>
-              </a:spcAft>
-            </a:pPr>
-            <a:r>
-              <a:rPr b="1" sz="1900">
-                <a:solidFill>
-                  <a:srgbClr val="1F3A5F"/>
-                </a:solidFill>
-              </a:rPr>
-              <a:t>▪  Our answer — </a:t>
-            </a:r>
-            <a:r>
-              <a:rPr sz="1900">
-                <a:solidFill>
-                  <a:srgbClr val="222222"/>
-                </a:solidFill>
-              </a:rPr>
-              <a:t>A RAG assistant that retrieves the right passage, generates a grounded response, and always shows the source — in two modes: General Q&amp;A and a Personal Eligibility Shortlist.</a:t>
-            </a:r>
-          </a:p>
-          <a:p>
-            <a:pPr>
-              <a:lnSpc>
-                <a:spcPct val="115000"/>
-              </a:lnSpc>
-              <a:spcAft>
-                <a:spcPts val="1200"/>
-              </a:spcAft>
-            </a:pPr>
-            <a:r>
-              <a:rPr b="1" sz="1900">
-                <a:solidFill>
-                  <a:srgbClr val="1F3A5F"/>
-                </a:solidFill>
-              </a:rPr>
-              <a:t>▪  Evidence-based question we set out to answer — </a:t>
-            </a:r>
-            <a:r>
-              <a:rPr sz="1900">
-                <a:solidFill>
-                  <a:srgbClr val="222222"/>
-                </a:solidFill>
-              </a:rPr>
-              <a:t>how effectively can our system retrieve the right evidence and produce a grounded, attributable answer for this domain?</a:t>
-            </a:r>
-          </a:p>
-        </p:txBody>
-      </p:sp>
-      <p:sp>
-        <p:nvSpPr>
-          <p:cNvPr id="6" name="TextBox 5"/>
+              <a:t>▪  Knowledge Base &amp; Chunking Strategy</a:t>
+            </a:r>
+          </a:p>
+        </p:txBody>
+      </p:sp>
+      <p:sp>
+        <p:nvSpPr>
+          <p:cNvPr id="8" name="TextBox 7"/>
           <p:cNvSpPr txBox="1"/>
           <p:nvPr/>
         </p:nvSpPr>
         <p:spPr>
           <a:xfrm>
-            <a:off x="9692640" y="6446520"/>
-            <a:ext cx="2286000" cy="320040"/>
+            <a:off x="713232" y="5029200"/>
+            <a:ext cx="2276856" cy="731520"/>
           </a:xfrm>
           <a:prstGeom prst="rect">
             <a:avLst/>
@@ -3997,14 +5499,671 @@
           </a:bodyPr>
           <a:lstStyle/>
           <a:p>
-            <a:pPr algn="r"/>
-            <a:r>
-              <a:rPr sz="1100" i="1">
+            <a:r>
+              <a:rPr sz="1300" b="1">
+                <a:solidFill>
+                  <a:srgbClr val="2E7D5B"/>
+                </a:solidFill>
+              </a:rPr>
+              <a:t>~2 min</a:t>
+            </a:r>
+          </a:p>
+          <a:p>
+            <a:r>
+              <a:rPr sz="1150" i="1">
                 <a:solidFill>
                   <a:srgbClr val="6B6B6B"/>
                 </a:solidFill>
               </a:rPr>
-              <a:t>Presented by: [Name]</a:t>
+              <a:t>Presenter: [Name 1]</a:t>
+            </a:r>
+          </a:p>
+        </p:txBody>
+      </p:sp>
+      <p:sp>
+        <p:nvSpPr>
+          <p:cNvPr id="9" name="Rounded Rectangle 8"/>
+          <p:cNvSpPr/>
+          <p:nvPr/>
+        </p:nvSpPr>
+        <p:spPr>
+          <a:xfrm>
+            <a:off x="3319272" y="1417320"/>
+            <a:ext cx="2606040" cy="4480560"/>
+          </a:xfrm>
+          <a:prstGeom prst="roundRect">
+            <a:avLst/>
+          </a:prstGeom>
+          <a:solidFill>
+            <a:srgbClr val="FFFFFF"/>
+          </a:solidFill>
+          <a:ln w="28575">
+            <a:solidFill>
+              <a:srgbClr val="1F6FB2"/>
+            </a:solidFill>
+          </a:ln>
+          <a:effectLst/>
+        </p:spPr>
+        <p:style>
+          <a:lnRef idx="1">
+            <a:schemeClr val="accent1"/>
+          </a:lnRef>
+          <a:fillRef idx="3">
+            <a:schemeClr val="accent1"/>
+          </a:fillRef>
+          <a:effectRef idx="2">
+            <a:schemeClr val="accent1"/>
+          </a:effectRef>
+          <a:fontRef idx="minor">
+            <a:schemeClr val="lt1"/>
+          </a:fontRef>
+        </p:style>
+        <p:txBody>
+          <a:bodyPr rtlCol="0" anchor="ctr"/>
+          <a:lstStyle/>
+          <a:p>
+            <a:pPr algn="ctr"/>
+          </a:p>
+        </p:txBody>
+      </p:sp>
+      <p:sp>
+        <p:nvSpPr>
+          <p:cNvPr id="10" name="Rounded Rectangle 9"/>
+          <p:cNvSpPr/>
+          <p:nvPr/>
+        </p:nvSpPr>
+        <p:spPr>
+          <a:xfrm>
+            <a:off x="3319272" y="1417320"/>
+            <a:ext cx="2606040" cy="1051560"/>
+          </a:xfrm>
+          <a:prstGeom prst="roundRect">
+            <a:avLst/>
+          </a:prstGeom>
+          <a:solidFill>
+            <a:srgbClr val="1F6FB2"/>
+          </a:solidFill>
+          <a:ln>
+            <a:noFill/>
+          </a:ln>
+          <a:effectLst/>
+        </p:spPr>
+        <p:style>
+          <a:lnRef idx="1">
+            <a:schemeClr val="accent1"/>
+          </a:lnRef>
+          <a:fillRef idx="3">
+            <a:schemeClr val="accent1"/>
+          </a:fillRef>
+          <a:effectRef idx="2">
+            <a:schemeClr val="accent1"/>
+          </a:effectRef>
+          <a:fontRef idx="minor">
+            <a:schemeClr val="lt1"/>
+          </a:fontRef>
+        </p:style>
+        <p:txBody>
+          <a:bodyPr rtlCol="0" anchor="ctr" wrap="square"/>
+          <a:lstStyle/>
+          <a:p>
+            <a:pPr algn="ctr"/>
+            <a:r>
+              <a:rPr sz="1500" b="1">
+                <a:solidFill>
+                  <a:srgbClr val="FFFFFF"/>
+                </a:solidFill>
+              </a:rPr>
+              <a:t>PART 2</a:t>
+            </a:r>
+          </a:p>
+          <a:p>
+            <a:pPr algn="ctr"/>
+            <a:r>
+              <a:rPr sz="1100" b="1">
+                <a:solidFill>
+                  <a:srgbClr val="FFFFFF"/>
+                </a:solidFill>
+              </a:rPr>
+              <a:t>RETRIEVAL</a:t>
+            </a:r>
+          </a:p>
+        </p:txBody>
+      </p:sp>
+      <p:sp>
+        <p:nvSpPr>
+          <p:cNvPr id="11" name="TextBox 10"/>
+          <p:cNvSpPr txBox="1"/>
+          <p:nvPr/>
+        </p:nvSpPr>
+        <p:spPr>
+          <a:xfrm>
+            <a:off x="3483864" y="2651760"/>
+            <a:ext cx="2276856" cy="2377440"/>
+          </a:xfrm>
+          <a:prstGeom prst="rect">
+            <a:avLst/>
+          </a:prstGeom>
+          <a:noFill/>
+        </p:spPr>
+        <p:txBody>
+          <a:bodyPr wrap="square">
+            <a:spAutoFit/>
+          </a:bodyPr>
+          <a:lstStyle/>
+          <a:p>
+            <a:pPr>
+              <a:spcAft>
+                <a:spcPts val="800"/>
+              </a:spcAft>
+            </a:pPr>
+            <a:r>
+              <a:rPr sz="1300">
+                <a:solidFill>
+                  <a:srgbClr val="222222"/>
+                </a:solidFill>
+              </a:rPr>
+              <a:t>▪  System Architecture</a:t>
+            </a:r>
+          </a:p>
+          <a:p>
+            <a:pPr>
+              <a:spcAft>
+                <a:spcPts val="800"/>
+              </a:spcAft>
+            </a:pPr>
+            <a:r>
+              <a:rPr sz="1300">
+                <a:solidFill>
+                  <a:srgbClr val="222222"/>
+                </a:solidFill>
+              </a:rPr>
+              <a:t>▪  Retrieval Design Decisions</a:t>
+            </a:r>
+          </a:p>
+        </p:txBody>
+      </p:sp>
+      <p:sp>
+        <p:nvSpPr>
+          <p:cNvPr id="12" name="TextBox 11"/>
+          <p:cNvSpPr txBox="1"/>
+          <p:nvPr/>
+        </p:nvSpPr>
+        <p:spPr>
+          <a:xfrm>
+            <a:off x="3483864" y="5029200"/>
+            <a:ext cx="2276856" cy="731520"/>
+          </a:xfrm>
+          <a:prstGeom prst="rect">
+            <a:avLst/>
+          </a:prstGeom>
+          <a:noFill/>
+        </p:spPr>
+        <p:txBody>
+          <a:bodyPr wrap="none">
+            <a:spAutoFit/>
+          </a:bodyPr>
+          <a:lstStyle/>
+          <a:p>
+            <a:r>
+              <a:rPr sz="1300" b="1">
+                <a:solidFill>
+                  <a:srgbClr val="1F6FB2"/>
+                </a:solidFill>
+              </a:rPr>
+              <a:t>~2.5 min</a:t>
+            </a:r>
+          </a:p>
+          <a:p>
+            <a:r>
+              <a:rPr sz="1150" i="1">
+                <a:solidFill>
+                  <a:srgbClr val="6B6B6B"/>
+                </a:solidFill>
+              </a:rPr>
+              <a:t>Presenter: [Name 2]</a:t>
+            </a:r>
+          </a:p>
+        </p:txBody>
+      </p:sp>
+      <p:sp>
+        <p:nvSpPr>
+          <p:cNvPr id="13" name="Rounded Rectangle 12"/>
+          <p:cNvSpPr/>
+          <p:nvPr/>
+        </p:nvSpPr>
+        <p:spPr>
+          <a:xfrm>
+            <a:off x="6089904" y="1417320"/>
+            <a:ext cx="2606040" cy="4480560"/>
+          </a:xfrm>
+          <a:prstGeom prst="roundRect">
+            <a:avLst/>
+          </a:prstGeom>
+          <a:solidFill>
+            <a:srgbClr val="FFFFFF"/>
+          </a:solidFill>
+          <a:ln w="28575">
+            <a:solidFill>
+              <a:srgbClr val="6B3FA0"/>
+            </a:solidFill>
+          </a:ln>
+          <a:effectLst/>
+        </p:spPr>
+        <p:style>
+          <a:lnRef idx="1">
+            <a:schemeClr val="accent1"/>
+          </a:lnRef>
+          <a:fillRef idx="3">
+            <a:schemeClr val="accent1"/>
+          </a:fillRef>
+          <a:effectRef idx="2">
+            <a:schemeClr val="accent1"/>
+          </a:effectRef>
+          <a:fontRef idx="minor">
+            <a:schemeClr val="lt1"/>
+          </a:fontRef>
+        </p:style>
+        <p:txBody>
+          <a:bodyPr rtlCol="0" anchor="ctr"/>
+          <a:lstStyle/>
+          <a:p>
+            <a:pPr algn="ctr"/>
+          </a:p>
+        </p:txBody>
+      </p:sp>
+      <p:sp>
+        <p:nvSpPr>
+          <p:cNvPr id="14" name="Rounded Rectangle 13"/>
+          <p:cNvSpPr/>
+          <p:nvPr/>
+        </p:nvSpPr>
+        <p:spPr>
+          <a:xfrm>
+            <a:off x="6089904" y="1417320"/>
+            <a:ext cx="2606040" cy="1051560"/>
+          </a:xfrm>
+          <a:prstGeom prst="roundRect">
+            <a:avLst/>
+          </a:prstGeom>
+          <a:solidFill>
+            <a:srgbClr val="6B3FA0"/>
+          </a:solidFill>
+          <a:ln>
+            <a:noFill/>
+          </a:ln>
+          <a:effectLst/>
+        </p:spPr>
+        <p:style>
+          <a:lnRef idx="1">
+            <a:schemeClr val="accent1"/>
+          </a:lnRef>
+          <a:fillRef idx="3">
+            <a:schemeClr val="accent1"/>
+          </a:fillRef>
+          <a:effectRef idx="2">
+            <a:schemeClr val="accent1"/>
+          </a:effectRef>
+          <a:fontRef idx="minor">
+            <a:schemeClr val="lt1"/>
+          </a:fontRef>
+        </p:style>
+        <p:txBody>
+          <a:bodyPr rtlCol="0" anchor="ctr" wrap="square"/>
+          <a:lstStyle/>
+          <a:p>
+            <a:pPr algn="ctr"/>
+            <a:r>
+              <a:rPr sz="1500" b="1">
+                <a:solidFill>
+                  <a:srgbClr val="FFFFFF"/>
+                </a:solidFill>
+              </a:rPr>
+              <a:t>PART 3</a:t>
+            </a:r>
+          </a:p>
+          <a:p>
+            <a:pPr algn="ctr"/>
+            <a:r>
+              <a:rPr sz="1100" b="1">
+                <a:solidFill>
+                  <a:srgbClr val="FFFFFF"/>
+                </a:solidFill>
+              </a:rPr>
+              <a:t>GENERATION &amp; APPLICATION</a:t>
+            </a:r>
+          </a:p>
+        </p:txBody>
+      </p:sp>
+      <p:sp>
+        <p:nvSpPr>
+          <p:cNvPr id="15" name="TextBox 14"/>
+          <p:cNvSpPr txBox="1"/>
+          <p:nvPr/>
+        </p:nvSpPr>
+        <p:spPr>
+          <a:xfrm>
+            <a:off x="6254496" y="2651760"/>
+            <a:ext cx="2276856" cy="2377440"/>
+          </a:xfrm>
+          <a:prstGeom prst="rect">
+            <a:avLst/>
+          </a:prstGeom>
+          <a:noFill/>
+        </p:spPr>
+        <p:txBody>
+          <a:bodyPr wrap="square">
+            <a:spAutoFit/>
+          </a:bodyPr>
+          <a:lstStyle/>
+          <a:p>
+            <a:pPr>
+              <a:spcAft>
+                <a:spcPts val="800"/>
+              </a:spcAft>
+            </a:pPr>
+            <a:r>
+              <a:rPr sz="1300">
+                <a:solidFill>
+                  <a:srgbClr val="222222"/>
+                </a:solidFill>
+              </a:rPr>
+              <a:t>▪  Generation &amp; Prompting Design</a:t>
+            </a:r>
+          </a:p>
+          <a:p>
+            <a:pPr>
+              <a:spcAft>
+                <a:spcPts val="800"/>
+              </a:spcAft>
+            </a:pPr>
+            <a:r>
+              <a:rPr sz="1300">
+                <a:solidFill>
+                  <a:srgbClr val="222222"/>
+                </a:solidFill>
+              </a:rPr>
+              <a:t>▪  Live Demonstration</a:t>
+            </a:r>
+          </a:p>
+        </p:txBody>
+      </p:sp>
+      <p:sp>
+        <p:nvSpPr>
+          <p:cNvPr id="16" name="TextBox 15"/>
+          <p:cNvSpPr txBox="1"/>
+          <p:nvPr/>
+        </p:nvSpPr>
+        <p:spPr>
+          <a:xfrm>
+            <a:off x="6254496" y="5029200"/>
+            <a:ext cx="2276856" cy="731520"/>
+          </a:xfrm>
+          <a:prstGeom prst="rect">
+            <a:avLst/>
+          </a:prstGeom>
+          <a:noFill/>
+        </p:spPr>
+        <p:txBody>
+          <a:bodyPr wrap="none">
+            <a:spAutoFit/>
+          </a:bodyPr>
+          <a:lstStyle/>
+          <a:p>
+            <a:r>
+              <a:rPr sz="1300" b="1">
+                <a:solidFill>
+                  <a:srgbClr val="6B3FA0"/>
+                </a:solidFill>
+              </a:rPr>
+              <a:t>~4 min</a:t>
+            </a:r>
+          </a:p>
+          <a:p>
+            <a:r>
+              <a:rPr sz="1150" i="1">
+                <a:solidFill>
+                  <a:srgbClr val="6B6B6B"/>
+                </a:solidFill>
+              </a:rPr>
+              <a:t>Presenter: [Name 3]</a:t>
+            </a:r>
+          </a:p>
+        </p:txBody>
+      </p:sp>
+      <p:sp>
+        <p:nvSpPr>
+          <p:cNvPr id="17" name="Rounded Rectangle 16"/>
+          <p:cNvSpPr/>
+          <p:nvPr/>
+        </p:nvSpPr>
+        <p:spPr>
+          <a:xfrm>
+            <a:off x="8860536" y="1417320"/>
+            <a:ext cx="2606040" cy="4480560"/>
+          </a:xfrm>
+          <a:prstGeom prst="roundRect">
+            <a:avLst/>
+          </a:prstGeom>
+          <a:solidFill>
+            <a:srgbClr val="FFFFFF"/>
+          </a:solidFill>
+          <a:ln w="28575">
+            <a:solidFill>
+              <a:srgbClr val="B2691F"/>
+            </a:solidFill>
+          </a:ln>
+          <a:effectLst/>
+        </p:spPr>
+        <p:style>
+          <a:lnRef idx="1">
+            <a:schemeClr val="accent1"/>
+          </a:lnRef>
+          <a:fillRef idx="3">
+            <a:schemeClr val="accent1"/>
+          </a:fillRef>
+          <a:effectRef idx="2">
+            <a:schemeClr val="accent1"/>
+          </a:effectRef>
+          <a:fontRef idx="minor">
+            <a:schemeClr val="lt1"/>
+          </a:fontRef>
+        </p:style>
+        <p:txBody>
+          <a:bodyPr rtlCol="0" anchor="ctr"/>
+          <a:lstStyle/>
+          <a:p>
+            <a:pPr algn="ctr"/>
+          </a:p>
+        </p:txBody>
+      </p:sp>
+      <p:sp>
+        <p:nvSpPr>
+          <p:cNvPr id="18" name="Rounded Rectangle 17"/>
+          <p:cNvSpPr/>
+          <p:nvPr/>
+        </p:nvSpPr>
+        <p:spPr>
+          <a:xfrm>
+            <a:off x="8860536" y="1417320"/>
+            <a:ext cx="2606040" cy="1051560"/>
+          </a:xfrm>
+          <a:prstGeom prst="roundRect">
+            <a:avLst/>
+          </a:prstGeom>
+          <a:solidFill>
+            <a:srgbClr val="B2691F"/>
+          </a:solidFill>
+          <a:ln>
+            <a:noFill/>
+          </a:ln>
+          <a:effectLst/>
+        </p:spPr>
+        <p:style>
+          <a:lnRef idx="1">
+            <a:schemeClr val="accent1"/>
+          </a:lnRef>
+          <a:fillRef idx="3">
+            <a:schemeClr val="accent1"/>
+          </a:fillRef>
+          <a:effectRef idx="2">
+            <a:schemeClr val="accent1"/>
+          </a:effectRef>
+          <a:fontRef idx="minor">
+            <a:schemeClr val="lt1"/>
+          </a:fontRef>
+        </p:style>
+        <p:txBody>
+          <a:bodyPr rtlCol="0" anchor="ctr" wrap="square"/>
+          <a:lstStyle/>
+          <a:p>
+            <a:pPr algn="ctr"/>
+            <a:r>
+              <a:rPr sz="1500" b="1">
+                <a:solidFill>
+                  <a:srgbClr val="FFFFFF"/>
+                </a:solidFill>
+              </a:rPr>
+              <a:t>PART 4</a:t>
+            </a:r>
+          </a:p>
+          <a:p>
+            <a:pPr algn="ctr"/>
+            <a:r>
+              <a:rPr sz="1100" b="1">
+                <a:solidFill>
+                  <a:srgbClr val="FFFFFF"/>
+                </a:solidFill>
+              </a:rPr>
+              <a:t>EVALUATION &amp; TESTING</a:t>
+            </a:r>
+          </a:p>
+        </p:txBody>
+      </p:sp>
+      <p:sp>
+        <p:nvSpPr>
+          <p:cNvPr id="19" name="TextBox 18"/>
+          <p:cNvSpPr txBox="1"/>
+          <p:nvPr/>
+        </p:nvSpPr>
+        <p:spPr>
+          <a:xfrm>
+            <a:off x="9025128" y="2651760"/>
+            <a:ext cx="2276856" cy="2377440"/>
+          </a:xfrm>
+          <a:prstGeom prst="rect">
+            <a:avLst/>
+          </a:prstGeom>
+          <a:noFill/>
+        </p:spPr>
+        <p:txBody>
+          <a:bodyPr wrap="square">
+            <a:spAutoFit/>
+          </a:bodyPr>
+          <a:lstStyle/>
+          <a:p>
+            <a:pPr>
+              <a:spcAft>
+                <a:spcPts val="800"/>
+              </a:spcAft>
+            </a:pPr>
+            <a:r>
+              <a:rPr sz="1300">
+                <a:solidFill>
+                  <a:srgbClr val="222222"/>
+                </a:solidFill>
+              </a:rPr>
+              <a:t>▪  Evaluation, Results, Failure Analysis</a:t>
+            </a:r>
+          </a:p>
+          <a:p>
+            <a:pPr>
+              <a:spcAft>
+                <a:spcPts val="800"/>
+              </a:spcAft>
+            </a:pPr>
+            <a:r>
+              <a:rPr sz="1300">
+                <a:solidFill>
+                  <a:srgbClr val="222222"/>
+                </a:solidFill>
+              </a:rPr>
+              <a:t>▪  Limitations, Lessons &amp; Next Steps</a:t>
+            </a:r>
+          </a:p>
+        </p:txBody>
+      </p:sp>
+      <p:sp>
+        <p:nvSpPr>
+          <p:cNvPr id="20" name="TextBox 19"/>
+          <p:cNvSpPr txBox="1"/>
+          <p:nvPr/>
+        </p:nvSpPr>
+        <p:spPr>
+          <a:xfrm>
+            <a:off x="9025128" y="5029200"/>
+            <a:ext cx="2276856" cy="731520"/>
+          </a:xfrm>
+          <a:prstGeom prst="rect">
+            <a:avLst/>
+          </a:prstGeom>
+          <a:noFill/>
+        </p:spPr>
+        <p:txBody>
+          <a:bodyPr wrap="none">
+            <a:spAutoFit/>
+          </a:bodyPr>
+          <a:lstStyle/>
+          <a:p>
+            <a:r>
+              <a:rPr sz="1300" b="1">
+                <a:solidFill>
+                  <a:srgbClr val="B2691F"/>
+                </a:solidFill>
+              </a:rPr>
+              <a:t>~3 min</a:t>
+            </a:r>
+          </a:p>
+          <a:p>
+            <a:r>
+              <a:rPr sz="1150" i="1">
+                <a:solidFill>
+                  <a:srgbClr val="6B6B6B"/>
+                </a:solidFill>
+              </a:rPr>
+              <a:t>Presenter: [Name 4]</a:t>
+            </a:r>
+          </a:p>
+        </p:txBody>
+      </p:sp>
+      <p:sp>
+        <p:nvSpPr>
+          <p:cNvPr id="21" name="TextBox 20"/>
+          <p:cNvSpPr txBox="1"/>
+          <p:nvPr/>
+        </p:nvSpPr>
+        <p:spPr>
+          <a:xfrm>
+            <a:off x="548640" y="6080760"/>
+            <a:ext cx="11064240" cy="548640"/>
+          </a:xfrm>
+          <a:prstGeom prst="rect">
+            <a:avLst/>
+          </a:prstGeom>
+          <a:noFill/>
+        </p:spPr>
+        <p:txBody>
+          <a:bodyPr wrap="none">
+            <a:spAutoFit/>
+          </a:bodyPr>
+          <a:lstStyle/>
+          <a:p>
+            <a:r>
+              <a:rPr sz="1200">
+                <a:solidFill>
+                  <a:srgbClr val="6B6B6B"/>
+                </a:solidFill>
+              </a:rPr>
+              <a:t>Parts follow the group's own responsibility areas: Data &amp; Ingestion → Retrieval → Generation &amp; Application → Evaluation &amp; Testing.</a:t>
             </a:r>
           </a:p>
         </p:txBody>
@@ -4050,7 +6209,7 @@
             <a:avLst/>
           </a:prstGeom>
           <a:solidFill>
-            <a:srgbClr val="1F3A5F"/>
+            <a:srgbClr val="2E7D5B"/>
           </a:solidFill>
           <a:ln>
             <a:noFill/>
@@ -4107,7 +6266,7 @@
                   <a:srgbClr val="B9CCE0"/>
                 </a:solidFill>
               </a:rPr>
-              <a:t>3 MIN — PART 1</a:t>
+              <a:t>PART 1 OF 4 · DATA &amp; INGESTION · ~1 MIN</a:t>
             </a:r>
           </a:p>
         </p:txBody>
@@ -4140,443 +6299,55 @@
                   <a:srgbClr val="FFFFFF"/>
                 </a:solidFill>
               </a:rPr>
-              <a:t>System Architecture</a:t>
-            </a:r>
-          </a:p>
-        </p:txBody>
-      </p:sp>
-      <p:sp>
-        <p:nvSpPr>
-          <p:cNvPr id="5" name="Rounded Rectangle 4"/>
-          <p:cNvSpPr/>
-          <p:nvPr/>
-        </p:nvSpPr>
-        <p:spPr>
-          <a:xfrm>
-            <a:off x="548640" y="2103120"/>
-            <a:ext cx="1965960" cy="914400"/>
-          </a:xfrm>
-          <a:prstGeom prst="roundRect">
-            <a:avLst/>
-          </a:prstGeom>
-          <a:solidFill>
-            <a:srgbClr val="1F3A5F"/>
-          </a:solidFill>
-          <a:ln w="12700">
-            <a:solidFill>
-              <a:srgbClr val="1F3A5F"/>
-            </a:solidFill>
-          </a:ln>
-          <a:effectLst/>
-        </p:spPr>
-        <p:style>
-          <a:lnRef idx="1">
-            <a:schemeClr val="accent1"/>
-          </a:lnRef>
-          <a:fillRef idx="3">
-            <a:schemeClr val="accent1"/>
-          </a:fillRef>
-          <a:effectRef idx="2">
-            <a:schemeClr val="accent1"/>
-          </a:effectRef>
-          <a:fontRef idx="minor">
-            <a:schemeClr val="lt1"/>
-          </a:fontRef>
-        </p:style>
-        <p:txBody>
-          <a:bodyPr rtlCol="0" anchor="ctr" wrap="square"/>
-          <a:lstStyle/>
-          <a:p>
-            <a:pPr algn="ctr"/>
-            <a:r>
-              <a:rPr sz="1250" b="1">
-                <a:solidFill>
-                  <a:srgbClr val="FFFFFF"/>
-                </a:solidFill>
-              </a:rPr>
-              <a:t>Browser
-(Q&amp;A / Profile UI)</a:t>
-            </a:r>
-          </a:p>
-        </p:txBody>
-      </p:sp>
-      <p:sp>
-        <p:nvSpPr>
-          <p:cNvPr id="6" name="Rounded Rectangle 5"/>
-          <p:cNvSpPr/>
-          <p:nvPr/>
-        </p:nvSpPr>
-        <p:spPr>
-          <a:xfrm>
-            <a:off x="2834640" y="2103120"/>
-            <a:ext cx="1965960" cy="914400"/>
-          </a:xfrm>
-          <a:prstGeom prst="roundRect">
-            <a:avLst/>
-          </a:prstGeom>
-          <a:solidFill>
-            <a:srgbClr val="1F3A5F"/>
-          </a:solidFill>
-          <a:ln w="12700">
-            <a:solidFill>
-              <a:srgbClr val="1F3A5F"/>
-            </a:solidFill>
-          </a:ln>
-          <a:effectLst/>
-        </p:spPr>
-        <p:style>
-          <a:lnRef idx="1">
-            <a:schemeClr val="accent1"/>
-          </a:lnRef>
-          <a:fillRef idx="3">
-            <a:schemeClr val="accent1"/>
-          </a:fillRef>
-          <a:effectRef idx="2">
-            <a:schemeClr val="accent1"/>
-          </a:effectRef>
-          <a:fontRef idx="minor">
-            <a:schemeClr val="lt1"/>
-          </a:fontRef>
-        </p:style>
-        <p:txBody>
-          <a:bodyPr rtlCol="0" anchor="ctr" wrap="square"/>
-          <a:lstStyle/>
-          <a:p>
-            <a:pPr algn="ctr"/>
-            <a:r>
-              <a:rPr sz="1250" b="1">
-                <a:solidFill>
-                  <a:srgbClr val="FFFFFF"/>
-                </a:solidFill>
-              </a:rPr>
-              <a:t>FastAPI Backend
-/api/query
-/api/profile-query</a:t>
-            </a:r>
-          </a:p>
-        </p:txBody>
-      </p:sp>
-      <p:sp>
-        <p:nvSpPr>
-          <p:cNvPr id="7" name="Rounded Rectangle 6"/>
-          <p:cNvSpPr/>
-          <p:nvPr/>
-        </p:nvSpPr>
-        <p:spPr>
-          <a:xfrm>
-            <a:off x="5120640" y="2103120"/>
-            <a:ext cx="1965960" cy="914400"/>
-          </a:xfrm>
-          <a:prstGeom prst="roundRect">
-            <a:avLst/>
-          </a:prstGeom>
-          <a:solidFill>
-            <a:srgbClr val="1F3A5F"/>
-          </a:solidFill>
-          <a:ln w="12700">
-            <a:solidFill>
-              <a:srgbClr val="1F3A5F"/>
-            </a:solidFill>
-          </a:ln>
-          <a:effectLst/>
-        </p:spPr>
-        <p:style>
-          <a:lnRef idx="1">
-            <a:schemeClr val="accent1"/>
-          </a:lnRef>
-          <a:fillRef idx="3">
-            <a:schemeClr val="accent1"/>
-          </a:fillRef>
-          <a:effectRef idx="2">
-            <a:schemeClr val="accent1"/>
-          </a:effectRef>
-          <a:fontRef idx="minor">
-            <a:schemeClr val="lt1"/>
-          </a:fontRef>
-        </p:style>
-        <p:txBody>
-          <a:bodyPr rtlCol="0" anchor="ctr" wrap="square"/>
-          <a:lstStyle/>
-          <a:p>
-            <a:pPr algn="ctr"/>
-            <a:r>
-              <a:rPr sz="1250" b="1">
-                <a:solidFill>
-                  <a:srgbClr val="FFFFFF"/>
-                </a:solidFill>
-              </a:rPr>
-              <a:t>RagIndex
-Chroma (dense) +
-BM25 (hybrid)</a:t>
-            </a:r>
-          </a:p>
-        </p:txBody>
-      </p:sp>
-      <p:sp>
-        <p:nvSpPr>
-          <p:cNvPr id="8" name="Rounded Rectangle 7"/>
-          <p:cNvSpPr/>
-          <p:nvPr/>
-        </p:nvSpPr>
-        <p:spPr>
-          <a:xfrm>
-            <a:off x="7406640" y="2103120"/>
-            <a:ext cx="1965960" cy="914400"/>
-          </a:xfrm>
-          <a:prstGeom prst="roundRect">
-            <a:avLst/>
-          </a:prstGeom>
-          <a:solidFill>
-            <a:srgbClr val="1F3A5F"/>
-          </a:solidFill>
-          <a:ln w="12700">
-            <a:solidFill>
-              <a:srgbClr val="1F3A5F"/>
-            </a:solidFill>
-          </a:ln>
-          <a:effectLst/>
-        </p:spPr>
-        <p:style>
-          <a:lnRef idx="1">
-            <a:schemeClr val="accent1"/>
-          </a:lnRef>
-          <a:fillRef idx="3">
-            <a:schemeClr val="accent1"/>
-          </a:fillRef>
-          <a:effectRef idx="2">
-            <a:schemeClr val="accent1"/>
-          </a:effectRef>
-          <a:fontRef idx="minor">
-            <a:schemeClr val="lt1"/>
-          </a:fontRef>
-        </p:style>
-        <p:txBody>
-          <a:bodyPr rtlCol="0" anchor="ctr" wrap="square"/>
-          <a:lstStyle/>
-          <a:p>
-            <a:pPr algn="ctr"/>
-            <a:r>
-              <a:rPr sz="1250" b="1">
-                <a:solidFill>
-                  <a:srgbClr val="FFFFFF"/>
-                </a:solidFill>
-              </a:rPr>
-              <a:t>LLM
-Gemini / Groq /
-OpenAI</a:t>
-            </a:r>
-          </a:p>
-        </p:txBody>
-      </p:sp>
-      <p:sp>
-        <p:nvSpPr>
-          <p:cNvPr id="9" name="Rounded Rectangle 8"/>
-          <p:cNvSpPr/>
-          <p:nvPr/>
-        </p:nvSpPr>
-        <p:spPr>
-          <a:xfrm>
-            <a:off x="9692640" y="2103120"/>
-            <a:ext cx="1965960" cy="914400"/>
-          </a:xfrm>
-          <a:prstGeom prst="roundRect">
-            <a:avLst/>
-          </a:prstGeom>
-          <a:solidFill>
-            <a:srgbClr val="1F3A5F"/>
-          </a:solidFill>
-          <a:ln w="12700">
-            <a:solidFill>
-              <a:srgbClr val="1F3A5F"/>
-            </a:solidFill>
-          </a:ln>
-          <a:effectLst/>
-        </p:spPr>
-        <p:style>
-          <a:lnRef idx="1">
-            <a:schemeClr val="accent1"/>
-          </a:lnRef>
-          <a:fillRef idx="3">
-            <a:schemeClr val="accent1"/>
-          </a:fillRef>
-          <a:effectRef idx="2">
-            <a:schemeClr val="accent1"/>
-          </a:effectRef>
-          <a:fontRef idx="minor">
-            <a:schemeClr val="lt1"/>
-          </a:fontRef>
-        </p:style>
-        <p:txBody>
-          <a:bodyPr rtlCol="0" anchor="ctr" wrap="square"/>
-          <a:lstStyle/>
-          <a:p>
-            <a:pPr algn="ctr"/>
-            <a:r>
-              <a:rPr sz="1250" b="1">
-                <a:solidFill>
-                  <a:srgbClr val="FFFFFF"/>
-                </a:solidFill>
-              </a:rPr>
-              <a:t>Answer +
-Sources JSON</a:t>
-            </a:r>
-          </a:p>
-        </p:txBody>
-      </p:sp>
-      <p:cxnSp>
-        <p:nvCxnSpPr>
-          <p:cNvPr id="10" name="Connector 9"/>
-          <p:cNvCxnSpPr/>
-          <p:nvPr/>
-        </p:nvCxnSpPr>
-        <p:spPr>
-          <a:xfrm>
-            <a:off x="2514600" y="2560320"/>
-            <a:ext cx="320040" cy="0"/>
-          </a:xfrm>
-          <a:prstGeom prst="line">
-            <a:avLst/>
-          </a:prstGeom>
-          <a:ln w="28575">
-            <a:solidFill>
-              <a:srgbClr val="2E7D5B"/>
-            </a:solidFill>
-            <a:tailEnd type="triangle" w="med" len="med"/>
-          </a:ln>
-        </p:spPr>
-        <p:style>
-          <a:lnRef idx="2">
-            <a:schemeClr val="accent1"/>
-          </a:lnRef>
-          <a:fillRef idx="0">
-            <a:schemeClr val="accent1"/>
-          </a:fillRef>
-          <a:effectRef idx="1">
-            <a:schemeClr val="accent1"/>
-          </a:effectRef>
-          <a:fontRef idx="minor">
-            <a:schemeClr val="tx1"/>
-          </a:fontRef>
-        </p:style>
-      </p:cxnSp>
-      <p:cxnSp>
-        <p:nvCxnSpPr>
-          <p:cNvPr id="11" name="Connector 10"/>
-          <p:cNvCxnSpPr/>
-          <p:nvPr/>
-        </p:nvCxnSpPr>
-        <p:spPr>
-          <a:xfrm>
-            <a:off x="4800600" y="2560320"/>
-            <a:ext cx="320040" cy="0"/>
-          </a:xfrm>
-          <a:prstGeom prst="line">
-            <a:avLst/>
-          </a:prstGeom>
-          <a:ln w="28575">
-            <a:solidFill>
-              <a:srgbClr val="2E7D5B"/>
-            </a:solidFill>
-            <a:tailEnd type="triangle" w="med" len="med"/>
-          </a:ln>
-        </p:spPr>
-        <p:style>
-          <a:lnRef idx="2">
-            <a:schemeClr val="accent1"/>
-          </a:lnRef>
-          <a:fillRef idx="0">
-            <a:schemeClr val="accent1"/>
-          </a:fillRef>
-          <a:effectRef idx="1">
-            <a:schemeClr val="accent1"/>
-          </a:effectRef>
-          <a:fontRef idx="minor">
-            <a:schemeClr val="tx1"/>
-          </a:fontRef>
-        </p:style>
-      </p:cxnSp>
-      <p:cxnSp>
-        <p:nvCxnSpPr>
-          <p:cNvPr id="12" name="Connector 11"/>
-          <p:cNvCxnSpPr/>
-          <p:nvPr/>
-        </p:nvCxnSpPr>
-        <p:spPr>
-          <a:xfrm>
-            <a:off x="7086600" y="2560320"/>
-            <a:ext cx="320040" cy="0"/>
-          </a:xfrm>
-          <a:prstGeom prst="line">
-            <a:avLst/>
-          </a:prstGeom>
-          <a:ln w="28575">
-            <a:solidFill>
-              <a:srgbClr val="2E7D5B"/>
-            </a:solidFill>
-            <a:tailEnd type="triangle" w="med" len="med"/>
-          </a:ln>
-        </p:spPr>
-        <p:style>
-          <a:lnRef idx="2">
-            <a:schemeClr val="accent1"/>
-          </a:lnRef>
-          <a:fillRef idx="0">
-            <a:schemeClr val="accent1"/>
-          </a:fillRef>
-          <a:effectRef idx="1">
-            <a:schemeClr val="accent1"/>
-          </a:effectRef>
-          <a:fontRef idx="minor">
-            <a:schemeClr val="tx1"/>
-          </a:fontRef>
-        </p:style>
-      </p:cxnSp>
-      <p:cxnSp>
-        <p:nvCxnSpPr>
-          <p:cNvPr id="13" name="Connector 12"/>
-          <p:cNvCxnSpPr/>
-          <p:nvPr/>
-        </p:nvCxnSpPr>
-        <p:spPr>
-          <a:xfrm>
-            <a:off x="9372600" y="2560320"/>
-            <a:ext cx="320040" cy="0"/>
-          </a:xfrm>
-          <a:prstGeom prst="line">
-            <a:avLst/>
-          </a:prstGeom>
-          <a:ln w="28575">
-            <a:solidFill>
-              <a:srgbClr val="2E7D5B"/>
-            </a:solidFill>
-            <a:tailEnd type="triangle" w="med" len="med"/>
-          </a:ln>
-        </p:spPr>
-        <p:style>
-          <a:lnRef idx="2">
-            <a:schemeClr val="accent1"/>
-          </a:lnRef>
-          <a:fillRef idx="0">
-            <a:schemeClr val="accent1"/>
-          </a:fillRef>
-          <a:effectRef idx="1">
-            <a:schemeClr val="accent1"/>
-          </a:effectRef>
-          <a:fontRef idx="minor">
-            <a:schemeClr val="tx1"/>
-          </a:fontRef>
-        </p:style>
-      </p:cxnSp>
-      <p:sp>
-        <p:nvSpPr>
-          <p:cNvPr id="14" name="TextBox 13"/>
+              <a:t>Problem &amp; Intended Users</a:t>
+            </a:r>
+          </a:p>
+        </p:txBody>
+      </p:sp>
+      <p:sp>
+        <p:nvSpPr>
+          <p:cNvPr id="5" name="TextBox 4"/>
           <p:cNvSpPr txBox="1"/>
           <p:nvPr/>
         </p:nvSpPr>
         <p:spPr>
           <a:xfrm>
-            <a:off x="640080" y="3429000"/>
-            <a:ext cx="10881360" cy="2926080"/>
+            <a:off x="9326880" y="6446520"/>
+            <a:ext cx="2651760" cy="320040"/>
+          </a:xfrm>
+          <a:prstGeom prst="rect">
+            <a:avLst/>
+          </a:prstGeom>
+          <a:noFill/>
+        </p:spPr>
+        <p:txBody>
+          <a:bodyPr wrap="none">
+            <a:spAutoFit/>
+          </a:bodyPr>
+          <a:lstStyle/>
+          <a:p>
+            <a:pPr algn="r"/>
+            <a:r>
+              <a:rPr sz="1100" b="1" i="0">
+                <a:solidFill>
+                  <a:srgbClr val="2E7D5B"/>
+                </a:solidFill>
+              </a:rPr>
+              <a:t>● Presenter: [Name 1]</a:t>
+            </a:r>
+          </a:p>
+        </p:txBody>
+      </p:sp>
+      <p:sp>
+        <p:nvSpPr>
+          <p:cNvPr id="6" name="TextBox 5"/>
+          <p:cNvSpPr txBox="1"/>
+          <p:nvPr/>
+        </p:nvSpPr>
+        <p:spPr>
+          <a:xfrm>
+            <a:off x="640080" y="1371600"/>
+            <a:ext cx="10881360" cy="4937760"/>
           </a:xfrm>
           <a:prstGeom prst="rect">
             <a:avLst/>
@@ -4598,12 +6369,20 @@
               </a:spcAft>
             </a:pPr>
             <a:r>
-              <a:rPr sz="1600">
+              <a:rPr b="1" sz="1900">
+                <a:solidFill>
+                  <a:srgbClr val="2E7D5B"/>
+                </a:solidFill>
+              </a:rPr>
+              <a:t>▪  Who it's for — </a:t>
+            </a:r>
+            <a:r>
+              <a:rPr sz="1900">
                 <a:solidFill>
                   <a:srgbClr val="222222"/>
                 </a:solidFill>
               </a:rPr>
-              <a:t>▪  Static HTML/CSS/JS frontend with two entry points — no build step required.</a:t>
+              <a:t>Singaporean residents — or people helping them, like social workers or family members — who need a plain-language answer to “Am I eligible for X?” or “How much is Y?”</a:t>
             </a:r>
           </a:p>
           <a:p>
@@ -4616,12 +6395,20 @@
               </a:spcAft>
             </a:pPr>
             <a:r>
-              <a:rPr sz="1600">
+              <a:rPr b="1" sz="1900">
+                <a:solidFill>
+                  <a:srgbClr val="2E7D5B"/>
+                </a:solidFill>
+              </a:rPr>
+              <a:t>▪  The problem — </a:t>
+            </a:r>
+            <a:r>
+              <a:rPr sz="1900">
                 <a:solidFill>
                   <a:srgbClr val="222222"/>
                 </a:solidFill>
               </a:rPr>
-              <a:t>▪  FastAPI backend exposes /api/query (general Q&amp;A), /api/profile-query (eligibility shortlist) and /api/config.</a:t>
+              <a:t>Eligibility rules and payout amounts are scattered across dozens of official PDFs, infographics and explainer videos. It's slow to search and easy to misread a condition.</a:t>
             </a:r>
           </a:p>
           <a:p>
@@ -4634,12 +6421,20 @@
               </a:spcAft>
             </a:pPr>
             <a:r>
-              <a:rPr sz="1600">
+              <a:rPr b="1" sz="1900">
+                <a:solidFill>
+                  <a:srgbClr val="2E7D5B"/>
+                </a:solidFill>
+              </a:rPr>
+              <a:t>▪  Our answer — </a:t>
+            </a:r>
+            <a:r>
+              <a:rPr sz="1900">
                 <a:solidFill>
                   <a:srgbClr val="222222"/>
                 </a:solidFill>
               </a:rPr>
-              <a:t>▪  RagIndex wraps the Chroma collection, BM25 index, chunk records and embedder in one retrieval object.</a:t>
+              <a:t>A RAG assistant that retrieves the right passage, generates a grounded response, and always shows the source — in two modes: General Q&amp;A and a Personal Eligibility Shortlist.</a:t>
             </a:r>
           </a:p>
           <a:p>
@@ -4652,46 +6447,20 @@
               </a:spcAft>
             </a:pPr>
             <a:r>
-              <a:rPr sz="1600">
+              <a:rPr b="1" sz="1900">
+                <a:solidFill>
+                  <a:srgbClr val="2E7D5B"/>
+                </a:solidFill>
+              </a:rPr>
+              <a:t>▪  Evidence-based question we set out to answer — </a:t>
+            </a:r>
+            <a:r>
+              <a:rPr sz="1900">
                 <a:solidFill>
                   <a:srgbClr val="222222"/>
                 </a:solidFill>
               </a:rPr>
-              <a:t>▪  LLM client is pluggable (Gemini / Groq / OpenAI); a Gradio app reuses the same modules as a demo-day fallback.</a:t>
-            </a:r>
-          </a:p>
-        </p:txBody>
-      </p:sp>
-      <p:sp>
-        <p:nvSpPr>
-          <p:cNvPr id="15" name="TextBox 14"/>
-          <p:cNvSpPr txBox="1"/>
-          <p:nvPr/>
-        </p:nvSpPr>
-        <p:spPr>
-          <a:xfrm>
-            <a:off x="9692640" y="6446520"/>
-            <a:ext cx="2286000" cy="320040"/>
-          </a:xfrm>
-          <a:prstGeom prst="rect">
-            <a:avLst/>
-          </a:prstGeom>
-          <a:noFill/>
-        </p:spPr>
-        <p:txBody>
-          <a:bodyPr wrap="none">
-            <a:spAutoFit/>
-          </a:bodyPr>
-          <a:lstStyle/>
-          <a:p>
-            <a:pPr algn="r"/>
-            <a:r>
-              <a:rPr sz="1100" i="1">
-                <a:solidFill>
-                  <a:srgbClr val="6B6B6B"/>
-                </a:solidFill>
-              </a:rPr>
-              <a:t>Presented by: [Name]</a:t>
+              <a:t>how effectively can our system retrieve the right evidence and produce a grounded, attributable answer for this domain?</a:t>
             </a:r>
           </a:p>
         </p:txBody>
@@ -4737,7 +6506,7 @@
             <a:avLst/>
           </a:prstGeom>
           <a:solidFill>
-            <a:srgbClr val="1F3A5F"/>
+            <a:srgbClr val="2E7D5B"/>
           </a:solidFill>
           <a:ln>
             <a:noFill/>
@@ -4794,7 +6563,7 @@
                   <a:srgbClr val="B9CCE0"/>
                 </a:solidFill>
               </a:rPr>
-              <a:t>3 MIN — PART 2</a:t>
+              <a:t>PART 1 OF 4 · DATA &amp; INGESTION · ~1.5 MIN</a:t>
             </a:r>
           </a:p>
         </p:txBody>
@@ -4832,9 +6601,43 @@
           </a:p>
         </p:txBody>
       </p:sp>
+      <p:sp>
+        <p:nvSpPr>
+          <p:cNvPr id="5" name="TextBox 4"/>
+          <p:cNvSpPr txBox="1"/>
+          <p:nvPr/>
+        </p:nvSpPr>
+        <p:spPr>
+          <a:xfrm>
+            <a:off x="9326880" y="6446520"/>
+            <a:ext cx="2651760" cy="320040"/>
+          </a:xfrm>
+          <a:prstGeom prst="rect">
+            <a:avLst/>
+          </a:prstGeom>
+          <a:noFill/>
+        </p:spPr>
+        <p:txBody>
+          <a:bodyPr wrap="none">
+            <a:spAutoFit/>
+          </a:bodyPr>
+          <a:lstStyle/>
+          <a:p>
+            <a:pPr algn="r"/>
+            <a:r>
+              <a:rPr sz="1100" b="1" i="0">
+                <a:solidFill>
+                  <a:srgbClr val="2E7D5B"/>
+                </a:solidFill>
+              </a:rPr>
+              <a:t>● Presenter: [Name 1]</a:t>
+            </a:r>
+          </a:p>
+        </p:txBody>
+      </p:sp>
       <p:graphicFrame>
         <p:nvGraphicFramePr>
-          <p:cNvPr id="5" name="Table 4"/>
+          <p:cNvPr id="6" name="Table 5"/>
           <p:cNvGraphicFramePr>
             <a:graphicFrameLocks noGrp="1"/>
           </p:cNvGraphicFramePr>
@@ -4874,7 +6677,7 @@
                   </a:txBody>
                   <a:tcPr>
                     <a:solidFill>
-                      <a:srgbClr val="1F3A5F"/>
+                      <a:srgbClr val="2E7D5B"/>
                     </a:solidFill>
                   </a:tcPr>
                 </a:tc>
@@ -4896,7 +6699,7 @@
                   </a:txBody>
                   <a:tcPr>
                     <a:solidFill>
-                      <a:srgbClr val="1F3A5F"/>
+                      <a:srgbClr val="2E7D5B"/>
                     </a:solidFill>
                   </a:tcPr>
                 </a:tc>
@@ -4918,7 +6721,7 @@
                   </a:txBody>
                   <a:tcPr>
                     <a:solidFill>
-                      <a:srgbClr val="1F3A5F"/>
+                      <a:srgbClr val="2E7D5B"/>
                     </a:solidFill>
                   </a:tcPr>
                 </a:tc>
@@ -5133,7 +6936,7 @@
       </p:graphicFrame>
       <p:sp>
         <p:nvSpPr>
-          <p:cNvPr id="6" name="TextBox 5"/>
+          <p:cNvPr id="7" name="TextBox 6"/>
           <p:cNvSpPr txBox="1"/>
           <p:nvPr/>
         </p:nvSpPr>
@@ -5222,40 +7025,6 @@
                 </a:solidFill>
               </a:rPr>
               <a:t>▪  Optional contextual chunking prepends a short “where this sits in the document” sentence before embedding, using a separate LLM quota from the live-query provider.</a:t>
-            </a:r>
-          </a:p>
-        </p:txBody>
-      </p:sp>
-      <p:sp>
-        <p:nvSpPr>
-          <p:cNvPr id="7" name="TextBox 6"/>
-          <p:cNvSpPr txBox="1"/>
-          <p:nvPr/>
-        </p:nvSpPr>
-        <p:spPr>
-          <a:xfrm>
-            <a:off x="9692640" y="6446520"/>
-            <a:ext cx="2286000" cy="320040"/>
-          </a:xfrm>
-          <a:prstGeom prst="rect">
-            <a:avLst/>
-          </a:prstGeom>
-          <a:noFill/>
-        </p:spPr>
-        <p:txBody>
-          <a:bodyPr wrap="none">
-            <a:spAutoFit/>
-          </a:bodyPr>
-          <a:lstStyle/>
-          <a:p>
-            <a:pPr algn="r"/>
-            <a:r>
-              <a:rPr sz="1100" i="1">
-                <a:solidFill>
-                  <a:srgbClr val="6B6B6B"/>
-                </a:solidFill>
-              </a:rPr>
-              <a:t>Presented by: [Name]</a:t>
             </a:r>
           </a:p>
         </p:txBody>
@@ -5301,7 +7070,7 @@
             <a:avLst/>
           </a:prstGeom>
           <a:solidFill>
-            <a:srgbClr val="1F3A5F"/>
+            <a:srgbClr val="1F6FB2"/>
           </a:solidFill>
           <a:ln>
             <a:noFill/>
@@ -5358,7 +7127,7 @@
                   <a:srgbClr val="B9CCE0"/>
                 </a:solidFill>
               </a:rPr>
-              <a:t>3 MIN — PART 3</a:t>
+              <a:t>PART 2 OF 4 · RETRIEVAL · ~1 MIN</a:t>
             </a:r>
           </a:p>
         </p:txBody>
@@ -5391,7 +7160,7 @@
                   <a:srgbClr val="FFFFFF"/>
                 </a:solidFill>
               </a:rPr>
-              <a:t>Retrieval &amp; Generation: Key Design Decisions</a:t>
+              <a:t>System Architecture</a:t>
             </a:r>
           </a:p>
         </p:txBody>
@@ -5404,8 +7173,464 @@
         </p:nvSpPr>
         <p:spPr>
           <a:xfrm>
-            <a:off x="640080" y="1417320"/>
-            <a:ext cx="10881360" cy="4846320"/>
+            <a:off x="9326880" y="6446520"/>
+            <a:ext cx="2651760" cy="320040"/>
+          </a:xfrm>
+          <a:prstGeom prst="rect">
+            <a:avLst/>
+          </a:prstGeom>
+          <a:noFill/>
+        </p:spPr>
+        <p:txBody>
+          <a:bodyPr wrap="none">
+            <a:spAutoFit/>
+          </a:bodyPr>
+          <a:lstStyle/>
+          <a:p>
+            <a:pPr algn="r"/>
+            <a:r>
+              <a:rPr sz="1100" b="1" i="0">
+                <a:solidFill>
+                  <a:srgbClr val="1F6FB2"/>
+                </a:solidFill>
+              </a:rPr>
+              <a:t>● Presenter: [Name 2]</a:t>
+            </a:r>
+          </a:p>
+        </p:txBody>
+      </p:sp>
+      <p:sp>
+        <p:nvSpPr>
+          <p:cNvPr id="6" name="Rounded Rectangle 5"/>
+          <p:cNvSpPr/>
+          <p:nvPr/>
+        </p:nvSpPr>
+        <p:spPr>
+          <a:xfrm>
+            <a:off x="548640" y="2103120"/>
+            <a:ext cx="1965960" cy="914400"/>
+          </a:xfrm>
+          <a:prstGeom prst="roundRect">
+            <a:avLst/>
+          </a:prstGeom>
+          <a:solidFill>
+            <a:srgbClr val="1F6FB2"/>
+          </a:solidFill>
+          <a:ln w="12700">
+            <a:solidFill>
+              <a:srgbClr val="1F3A5F"/>
+            </a:solidFill>
+          </a:ln>
+          <a:effectLst/>
+        </p:spPr>
+        <p:style>
+          <a:lnRef idx="1">
+            <a:schemeClr val="accent1"/>
+          </a:lnRef>
+          <a:fillRef idx="3">
+            <a:schemeClr val="accent1"/>
+          </a:fillRef>
+          <a:effectRef idx="2">
+            <a:schemeClr val="accent1"/>
+          </a:effectRef>
+          <a:fontRef idx="minor">
+            <a:schemeClr val="lt1"/>
+          </a:fontRef>
+        </p:style>
+        <p:txBody>
+          <a:bodyPr rtlCol="0" anchor="ctr" wrap="square"/>
+          <a:lstStyle/>
+          <a:p>
+            <a:pPr algn="ctr"/>
+            <a:r>
+              <a:rPr sz="1250" b="1">
+                <a:solidFill>
+                  <a:srgbClr val="FFFFFF"/>
+                </a:solidFill>
+              </a:rPr>
+              <a:t>Browser
+(Q&amp;A / Profile UI)</a:t>
+            </a:r>
+          </a:p>
+        </p:txBody>
+      </p:sp>
+      <p:sp>
+        <p:nvSpPr>
+          <p:cNvPr id="7" name="Rounded Rectangle 6"/>
+          <p:cNvSpPr/>
+          <p:nvPr/>
+        </p:nvSpPr>
+        <p:spPr>
+          <a:xfrm>
+            <a:off x="2834640" y="2103120"/>
+            <a:ext cx="1965960" cy="914400"/>
+          </a:xfrm>
+          <a:prstGeom prst="roundRect">
+            <a:avLst/>
+          </a:prstGeom>
+          <a:solidFill>
+            <a:srgbClr val="1F6FB2"/>
+          </a:solidFill>
+          <a:ln w="12700">
+            <a:solidFill>
+              <a:srgbClr val="1F3A5F"/>
+            </a:solidFill>
+          </a:ln>
+          <a:effectLst/>
+        </p:spPr>
+        <p:style>
+          <a:lnRef idx="1">
+            <a:schemeClr val="accent1"/>
+          </a:lnRef>
+          <a:fillRef idx="3">
+            <a:schemeClr val="accent1"/>
+          </a:fillRef>
+          <a:effectRef idx="2">
+            <a:schemeClr val="accent1"/>
+          </a:effectRef>
+          <a:fontRef idx="minor">
+            <a:schemeClr val="lt1"/>
+          </a:fontRef>
+        </p:style>
+        <p:txBody>
+          <a:bodyPr rtlCol="0" anchor="ctr" wrap="square"/>
+          <a:lstStyle/>
+          <a:p>
+            <a:pPr algn="ctr"/>
+            <a:r>
+              <a:rPr sz="1250" b="1">
+                <a:solidFill>
+                  <a:srgbClr val="FFFFFF"/>
+                </a:solidFill>
+              </a:rPr>
+              <a:t>FastAPI Backend
+/api/query
+/api/profile-query</a:t>
+            </a:r>
+          </a:p>
+        </p:txBody>
+      </p:sp>
+      <p:sp>
+        <p:nvSpPr>
+          <p:cNvPr id="8" name="Rounded Rectangle 7"/>
+          <p:cNvSpPr/>
+          <p:nvPr/>
+        </p:nvSpPr>
+        <p:spPr>
+          <a:xfrm>
+            <a:off x="5120640" y="2103120"/>
+            <a:ext cx="1965960" cy="914400"/>
+          </a:xfrm>
+          <a:prstGeom prst="roundRect">
+            <a:avLst/>
+          </a:prstGeom>
+          <a:solidFill>
+            <a:srgbClr val="1F6FB2"/>
+          </a:solidFill>
+          <a:ln w="12700">
+            <a:solidFill>
+              <a:srgbClr val="1F3A5F"/>
+            </a:solidFill>
+          </a:ln>
+          <a:effectLst/>
+        </p:spPr>
+        <p:style>
+          <a:lnRef idx="1">
+            <a:schemeClr val="accent1"/>
+          </a:lnRef>
+          <a:fillRef idx="3">
+            <a:schemeClr val="accent1"/>
+          </a:fillRef>
+          <a:effectRef idx="2">
+            <a:schemeClr val="accent1"/>
+          </a:effectRef>
+          <a:fontRef idx="minor">
+            <a:schemeClr val="lt1"/>
+          </a:fontRef>
+        </p:style>
+        <p:txBody>
+          <a:bodyPr rtlCol="0" anchor="ctr" wrap="square"/>
+          <a:lstStyle/>
+          <a:p>
+            <a:pPr algn="ctr"/>
+            <a:r>
+              <a:rPr sz="1250" b="1">
+                <a:solidFill>
+                  <a:srgbClr val="FFFFFF"/>
+                </a:solidFill>
+              </a:rPr>
+              <a:t>RagIndex
+Chroma (dense) +
+BM25 (hybrid)</a:t>
+            </a:r>
+          </a:p>
+        </p:txBody>
+      </p:sp>
+      <p:sp>
+        <p:nvSpPr>
+          <p:cNvPr id="9" name="Rounded Rectangle 8"/>
+          <p:cNvSpPr/>
+          <p:nvPr/>
+        </p:nvSpPr>
+        <p:spPr>
+          <a:xfrm>
+            <a:off x="7406640" y="2103120"/>
+            <a:ext cx="1965960" cy="914400"/>
+          </a:xfrm>
+          <a:prstGeom prst="roundRect">
+            <a:avLst/>
+          </a:prstGeom>
+          <a:solidFill>
+            <a:srgbClr val="1F6FB2"/>
+          </a:solidFill>
+          <a:ln w="12700">
+            <a:solidFill>
+              <a:srgbClr val="1F3A5F"/>
+            </a:solidFill>
+          </a:ln>
+          <a:effectLst/>
+        </p:spPr>
+        <p:style>
+          <a:lnRef idx="1">
+            <a:schemeClr val="accent1"/>
+          </a:lnRef>
+          <a:fillRef idx="3">
+            <a:schemeClr val="accent1"/>
+          </a:fillRef>
+          <a:effectRef idx="2">
+            <a:schemeClr val="accent1"/>
+          </a:effectRef>
+          <a:fontRef idx="minor">
+            <a:schemeClr val="lt1"/>
+          </a:fontRef>
+        </p:style>
+        <p:txBody>
+          <a:bodyPr rtlCol="0" anchor="ctr" wrap="square"/>
+          <a:lstStyle/>
+          <a:p>
+            <a:pPr algn="ctr"/>
+            <a:r>
+              <a:rPr sz="1250" b="1">
+                <a:solidFill>
+                  <a:srgbClr val="FFFFFF"/>
+                </a:solidFill>
+              </a:rPr>
+              <a:t>LLM
+Gemini / Groq /
+OpenAI</a:t>
+            </a:r>
+          </a:p>
+        </p:txBody>
+      </p:sp>
+      <p:sp>
+        <p:nvSpPr>
+          <p:cNvPr id="10" name="Rounded Rectangle 9"/>
+          <p:cNvSpPr/>
+          <p:nvPr/>
+        </p:nvSpPr>
+        <p:spPr>
+          <a:xfrm>
+            <a:off x="9692640" y="2103120"/>
+            <a:ext cx="1965960" cy="914400"/>
+          </a:xfrm>
+          <a:prstGeom prst="roundRect">
+            <a:avLst/>
+          </a:prstGeom>
+          <a:solidFill>
+            <a:srgbClr val="1F6FB2"/>
+          </a:solidFill>
+          <a:ln w="12700">
+            <a:solidFill>
+              <a:srgbClr val="1F3A5F"/>
+            </a:solidFill>
+          </a:ln>
+          <a:effectLst/>
+        </p:spPr>
+        <p:style>
+          <a:lnRef idx="1">
+            <a:schemeClr val="accent1"/>
+          </a:lnRef>
+          <a:fillRef idx="3">
+            <a:schemeClr val="accent1"/>
+          </a:fillRef>
+          <a:effectRef idx="2">
+            <a:schemeClr val="accent1"/>
+          </a:effectRef>
+          <a:fontRef idx="minor">
+            <a:schemeClr val="lt1"/>
+          </a:fontRef>
+        </p:style>
+        <p:txBody>
+          <a:bodyPr rtlCol="0" anchor="ctr" wrap="square"/>
+          <a:lstStyle/>
+          <a:p>
+            <a:pPr algn="ctr"/>
+            <a:r>
+              <a:rPr sz="1250" b="1">
+                <a:solidFill>
+                  <a:srgbClr val="FFFFFF"/>
+                </a:solidFill>
+              </a:rPr>
+              <a:t>Answer +
+Sources JSON</a:t>
+            </a:r>
+          </a:p>
+        </p:txBody>
+      </p:sp>
+      <p:cxnSp>
+        <p:nvCxnSpPr>
+          <p:cNvPr id="11" name="Connector 10"/>
+          <p:cNvCxnSpPr/>
+          <p:nvPr/>
+        </p:nvCxnSpPr>
+        <p:spPr>
+          <a:xfrm>
+            <a:off x="2514600" y="2560320"/>
+            <a:ext cx="320040" cy="0"/>
+          </a:xfrm>
+          <a:prstGeom prst="line">
+            <a:avLst/>
+          </a:prstGeom>
+          <a:ln w="28575">
+            <a:solidFill>
+              <a:srgbClr val="2E7D5B"/>
+            </a:solidFill>
+            <a:tailEnd type="triangle" w="med" len="med"/>
+          </a:ln>
+        </p:spPr>
+        <p:style>
+          <a:lnRef idx="2">
+            <a:schemeClr val="accent1"/>
+          </a:lnRef>
+          <a:fillRef idx="0">
+            <a:schemeClr val="accent1"/>
+          </a:fillRef>
+          <a:effectRef idx="1">
+            <a:schemeClr val="accent1"/>
+          </a:effectRef>
+          <a:fontRef idx="minor">
+            <a:schemeClr val="tx1"/>
+          </a:fontRef>
+        </p:style>
+      </p:cxnSp>
+      <p:cxnSp>
+        <p:nvCxnSpPr>
+          <p:cNvPr id="12" name="Connector 11"/>
+          <p:cNvCxnSpPr/>
+          <p:nvPr/>
+        </p:nvCxnSpPr>
+        <p:spPr>
+          <a:xfrm>
+            <a:off x="4800600" y="2560320"/>
+            <a:ext cx="320040" cy="0"/>
+          </a:xfrm>
+          <a:prstGeom prst="line">
+            <a:avLst/>
+          </a:prstGeom>
+          <a:ln w="28575">
+            <a:solidFill>
+              <a:srgbClr val="2E7D5B"/>
+            </a:solidFill>
+            <a:tailEnd type="triangle" w="med" len="med"/>
+          </a:ln>
+        </p:spPr>
+        <p:style>
+          <a:lnRef idx="2">
+            <a:schemeClr val="accent1"/>
+          </a:lnRef>
+          <a:fillRef idx="0">
+            <a:schemeClr val="accent1"/>
+          </a:fillRef>
+          <a:effectRef idx="1">
+            <a:schemeClr val="accent1"/>
+          </a:effectRef>
+          <a:fontRef idx="minor">
+            <a:schemeClr val="tx1"/>
+          </a:fontRef>
+        </p:style>
+      </p:cxnSp>
+      <p:cxnSp>
+        <p:nvCxnSpPr>
+          <p:cNvPr id="13" name="Connector 12"/>
+          <p:cNvCxnSpPr/>
+          <p:nvPr/>
+        </p:nvCxnSpPr>
+        <p:spPr>
+          <a:xfrm>
+            <a:off x="7086600" y="2560320"/>
+            <a:ext cx="320040" cy="0"/>
+          </a:xfrm>
+          <a:prstGeom prst="line">
+            <a:avLst/>
+          </a:prstGeom>
+          <a:ln w="28575">
+            <a:solidFill>
+              <a:srgbClr val="2E7D5B"/>
+            </a:solidFill>
+            <a:tailEnd type="triangle" w="med" len="med"/>
+          </a:ln>
+        </p:spPr>
+        <p:style>
+          <a:lnRef idx="2">
+            <a:schemeClr val="accent1"/>
+          </a:lnRef>
+          <a:fillRef idx="0">
+            <a:schemeClr val="accent1"/>
+          </a:fillRef>
+          <a:effectRef idx="1">
+            <a:schemeClr val="accent1"/>
+          </a:effectRef>
+          <a:fontRef idx="minor">
+            <a:schemeClr val="tx1"/>
+          </a:fontRef>
+        </p:style>
+      </p:cxnSp>
+      <p:cxnSp>
+        <p:nvCxnSpPr>
+          <p:cNvPr id="14" name="Connector 13"/>
+          <p:cNvCxnSpPr/>
+          <p:nvPr/>
+        </p:nvCxnSpPr>
+        <p:spPr>
+          <a:xfrm>
+            <a:off x="9372600" y="2560320"/>
+            <a:ext cx="320040" cy="0"/>
+          </a:xfrm>
+          <a:prstGeom prst="line">
+            <a:avLst/>
+          </a:prstGeom>
+          <a:ln w="28575">
+            <a:solidFill>
+              <a:srgbClr val="2E7D5B"/>
+            </a:solidFill>
+            <a:tailEnd type="triangle" w="med" len="med"/>
+          </a:ln>
+        </p:spPr>
+        <p:style>
+          <a:lnRef idx="2">
+            <a:schemeClr val="accent1"/>
+          </a:lnRef>
+          <a:fillRef idx="0">
+            <a:schemeClr val="accent1"/>
+          </a:fillRef>
+          <a:effectRef idx="1">
+            <a:schemeClr val="accent1"/>
+          </a:effectRef>
+          <a:fontRef idx="minor">
+            <a:schemeClr val="tx1"/>
+          </a:fontRef>
+        </p:style>
+      </p:cxnSp>
+      <p:sp>
+        <p:nvSpPr>
+          <p:cNvPr id="15" name="TextBox 14"/>
+          <p:cNvSpPr txBox="1"/>
+          <p:nvPr/>
+        </p:nvSpPr>
+        <p:spPr>
+          <a:xfrm>
+            <a:off x="640080" y="3429000"/>
+            <a:ext cx="10881360" cy="2926080"/>
           </a:xfrm>
           <a:prstGeom prst="rect">
             <a:avLst/>
@@ -5427,20 +7652,12 @@
               </a:spcAft>
             </a:pPr>
             <a:r>
-              <a:rPr b="1" sz="1750">
-                <a:solidFill>
-                  <a:srgbClr val="1F3A5F"/>
-                </a:solidFill>
-              </a:rPr>
-              <a:t>▪  Dense + hybrid retrieval — </a:t>
-            </a:r>
-            <a:r>
-              <a:rPr sz="1750">
+              <a:rPr sz="1600">
                 <a:solidFill>
                   <a:srgbClr val="222222"/>
                 </a:solidFill>
               </a:rPr>
-              <a:t>BAAI/bge-m3 dense embeddings in Chroma; hybrid mode fuses BM25 keyword search via Reciprocal Rank Fusion (k=60).</a:t>
+              <a:t>▪  Static HTML/CSS/JS frontend with two entry points — no build step required.</a:t>
             </a:r>
           </a:p>
           <a:p>
@@ -5453,20 +7670,12 @@
               </a:spcAft>
             </a:pPr>
             <a:r>
-              <a:rPr b="1" sz="1750">
-                <a:solidFill>
-                  <a:srgbClr val="1F3A5F"/>
-                </a:solidFill>
-              </a:rPr>
-              <a:t>▪  Two-layer abstention gate — </a:t>
-            </a:r>
-            <a:r>
-              <a:rPr sz="1750">
+              <a:rPr sz="1600">
                 <a:solidFill>
                   <a:srgbClr val="222222"/>
                 </a:solidFill>
               </a:rPr>
-              <a:t>a similarity-threshold check (0.35) before the LLM is ever called, plus an in-prompt instruction to abstain if evidence is insufficient.</a:t>
+              <a:t>▪  FastAPI backend exposes /api/query (general Q&amp;A), /api/profile-query (eligibility shortlist) and /api/config.</a:t>
             </a:r>
           </a:p>
           <a:p>
@@ -5479,20 +7688,12 @@
               </a:spcAft>
             </a:pPr>
             <a:r>
-              <a:rPr b="1" sz="1750">
-                <a:solidFill>
-                  <a:srgbClr val="1F3A5F"/>
-                </a:solidFill>
-              </a:rPr>
-              <a:t>▪  Agentic pipeline — </a:t>
-            </a:r>
-            <a:r>
-              <a:rPr sz="1750">
+              <a:rPr sz="1600">
                 <a:solidFill>
                   <a:srgbClr val="222222"/>
                 </a:solidFill>
               </a:rPr>
-              <a:t>query-rewrite agent, personal-situation intent router, profile-extraction agent, and an eligibility-shortlist assessor.</a:t>
+              <a:t>▪  RagIndex wraps the Chroma collection, BM25 index, chunk records and embedder in one retrieval object.</a:t>
             </a:r>
           </a:p>
           <a:p>
@@ -5505,80 +7706,12 @@
               </a:spcAft>
             </a:pPr>
             <a:r>
-              <a:rPr b="1" sz="1750">
-                <a:solidFill>
-                  <a:srgbClr val="1F3A5F"/>
-                </a:solidFill>
-              </a:rPr>
-              <a:t>▪  Deterministic grounding safeguard — </a:t>
-            </a:r>
-            <a:r>
-              <a:rPr sz="1750">
+              <a:rPr sz="1600">
                 <a:solidFill>
                   <a:srgbClr val="222222"/>
                 </a:solidFill>
               </a:rPr>
-              <a:t>the eligible/unclear/not_assessed bucket for each scheme is derived in code from structured conditions — never taken from the model's own prose.</a:t>
-            </a:r>
-          </a:p>
-          <a:p>
-            <a:pPr>
-              <a:lnSpc>
-                <a:spcPct val="115000"/>
-              </a:lnSpc>
-              <a:spcAft>
-                <a:spcPts val="1200"/>
-              </a:spcAft>
-            </a:pPr>
-            <a:r>
-              <a:rPr b="1" sz="1750">
-                <a:solidFill>
-                  <a:srgbClr val="1F3A5F"/>
-                </a:solidFill>
-              </a:rPr>
-              <a:t>▪  Safety — </a:t>
-            </a:r>
-            <a:r>
-              <a:rPr sz="1750">
-                <a:solidFill>
-                  <a:srgbClr val="222222"/>
-                </a:solidFill>
-              </a:rPr>
-              <a:t>NRIC/FIN-shaped identifiers are redacted before any query reaches an LLM; every citation is validated against the retrieved set.</a:t>
-            </a:r>
-          </a:p>
-        </p:txBody>
-      </p:sp>
-      <p:sp>
-        <p:nvSpPr>
-          <p:cNvPr id="6" name="TextBox 5"/>
-          <p:cNvSpPr txBox="1"/>
-          <p:nvPr/>
-        </p:nvSpPr>
-        <p:spPr>
-          <a:xfrm>
-            <a:off x="9692640" y="6446520"/>
-            <a:ext cx="2286000" cy="320040"/>
-          </a:xfrm>
-          <a:prstGeom prst="rect">
-            <a:avLst/>
-          </a:prstGeom>
-          <a:noFill/>
-        </p:spPr>
-        <p:txBody>
-          <a:bodyPr wrap="none">
-            <a:spAutoFit/>
-          </a:bodyPr>
-          <a:lstStyle/>
-          <a:p>
-            <a:pPr algn="r"/>
-            <a:r>
-              <a:rPr sz="1100" i="1">
-                <a:solidFill>
-                  <a:srgbClr val="6B6B6B"/>
-                </a:solidFill>
-              </a:rPr>
-              <a:t>Presented by: [Name]</a:t>
+              <a:t>▪  LLM client is pluggable (Gemini / Groq / OpenAI); a Gradio app reuses the same modules as a demo-day fallback.</a:t>
             </a:r>
           </a:p>
         </p:txBody>
@@ -5624,7 +7757,7 @@
             <a:avLst/>
           </a:prstGeom>
           <a:solidFill>
-            <a:srgbClr val="1F3A5F"/>
+            <a:srgbClr val="1F6FB2"/>
           </a:solidFill>
           <a:ln>
             <a:noFill/>
@@ -5681,7 +7814,7 @@
                   <a:srgbClr val="B9CCE0"/>
                 </a:solidFill>
               </a:rPr>
-              <a:t>3 MIN</a:t>
+              <a:t>PART 2 OF 4 · RETRIEVAL · ~1.5 MIN</a:t>
             </a:r>
           </a:p>
         </p:txBody>
@@ -5714,7 +7847,7 @@
                   <a:srgbClr val="FFFFFF"/>
                 </a:solidFill>
               </a:rPr>
-              <a:t>Live Demonstration</a:t>
+              <a:t>Retrieval Design Decisions</a:t>
             </a:r>
           </a:p>
         </p:txBody>
@@ -5722,6 +7855,40 @@
       <p:sp>
         <p:nvSpPr>
           <p:cNvPr id="5" name="TextBox 4"/>
+          <p:cNvSpPr txBox="1"/>
+          <p:nvPr/>
+        </p:nvSpPr>
+        <p:spPr>
+          <a:xfrm>
+            <a:off x="9326880" y="6446520"/>
+            <a:ext cx="2651760" cy="320040"/>
+          </a:xfrm>
+          <a:prstGeom prst="rect">
+            <a:avLst/>
+          </a:prstGeom>
+          <a:noFill/>
+        </p:spPr>
+        <p:txBody>
+          <a:bodyPr wrap="none">
+            <a:spAutoFit/>
+          </a:bodyPr>
+          <a:lstStyle/>
+          <a:p>
+            <a:pPr algn="r"/>
+            <a:r>
+              <a:rPr sz="1100" b="1" i="0">
+                <a:solidFill>
+                  <a:srgbClr val="1F6FB2"/>
+                </a:solidFill>
+              </a:rPr>
+              <a:t>● Presenter: [Name 2]</a:t>
+            </a:r>
+          </a:p>
+        </p:txBody>
+      </p:sp>
+      <p:sp>
+        <p:nvSpPr>
+          <p:cNvPr id="6" name="TextBox 5"/>
           <p:cNvSpPr txBox="1"/>
           <p:nvPr/>
         </p:nvSpPr>
@@ -5750,20 +7917,20 @@
               </a:spcAft>
             </a:pPr>
             <a:r>
-              <a:rPr b="1" sz="1900">
-                <a:solidFill>
-                  <a:srgbClr val="1F3A5F"/>
-                </a:solidFill>
-              </a:rPr>
-              <a:t>▪  General Q&amp;A example — </a:t>
-            </a:r>
-            <a:r>
-              <a:rPr sz="1900">
+              <a:rPr b="1" sz="1800">
+                <a:solidFill>
+                  <a:srgbClr val="1F6FB2"/>
+                </a:solidFill>
+              </a:rPr>
+              <a:t>▪  Dense + hybrid retrieval — </a:t>
+            </a:r>
+            <a:r>
+              <a:rPr sz="1800">
                 <a:solidFill>
                   <a:srgbClr val="222222"/>
                 </a:solidFill>
               </a:rPr>
-              <a:t>“How much does each eligible Singaporean household get from CDC Vouchers?” — grounded answer with [scheme, section] citation.</a:t>
+              <a:t>BAAI/bge-m3 dense embeddings in Chroma; hybrid mode fuses BM25 keyword search via Reciprocal Rank Fusion (k=60).</a:t>
             </a:r>
           </a:p>
           <a:p>
@@ -5776,20 +7943,20 @@
               </a:spcAft>
             </a:pPr>
             <a:r>
-              <a:rPr b="1" sz="1900">
-                <a:solidFill>
-                  <a:srgbClr val="1F3A5F"/>
-                </a:solidFill>
-              </a:rPr>
-              <a:t>▪  Personal Eligibility Shortlist example — </a:t>
-            </a:r>
-            <a:r>
-              <a:rPr sz="1900">
+              <a:rPr b="1" sz="1800">
+                <a:solidFill>
+                  <a:srgbClr val="1F6FB2"/>
+                </a:solidFill>
+              </a:rPr>
+              <a:t>▪  Two-layer abstention gate — </a:t>
+            </a:r>
+            <a:r>
+              <a:rPr sz="1800">
                 <a:solidFill>
                   <a:srgbClr val="222222"/>
                 </a:solidFill>
               </a:rPr>
-              <a:t>Profile: Singapore Citizen, age 68, HDB flat, retired — shortlist surfaces Silver Support and cost-of-living schemes as “Possibly eligible” with per-condition reasoning.</a:t>
+              <a:t>a similarity-threshold check (0.35) before the LLM is ever called, plus an in-prompt instruction to abstain if evidence is insufficient.</a:t>
             </a:r>
           </a:p>
           <a:p>
@@ -5802,20 +7969,20 @@
               </a:spcAft>
             </a:pPr>
             <a:r>
-              <a:rPr b="1" sz="1900">
-                <a:solidFill>
-                  <a:srgbClr val="1F3A5F"/>
-                </a:solidFill>
-              </a:rPr>
-              <a:t>▪  Unanswerable question example — </a:t>
-            </a:r>
-            <a:r>
-              <a:rPr sz="1900">
+              <a:rPr b="1" sz="1800">
+                <a:solidFill>
+                  <a:srgbClr val="1F6FB2"/>
+                </a:solidFill>
+              </a:rPr>
+              <a:t>▪  Configurable parameters — </a:t>
+            </a:r>
+            <a:r>
+              <a:rPr sz="1800">
                 <a:solidFill>
                   <a:srgbClr val="222222"/>
                 </a:solidFill>
               </a:rPr>
-              <a:t>“Can I use my CDC Vouchers to pay my IRAS income tax bill?” — correctly triggers the fallback message instead of guessing.</a:t>
+              <a:t>top_k = 5, similarity threshold = 0.35, chunk size/overlap = 350/50 words, and a dense/hybrid retrieval-mode toggle.</a:t>
             </a:r>
           </a:p>
           <a:p>
@@ -5828,46 +7995,20 @@
               </a:spcAft>
             </a:pPr>
             <a:r>
-              <a:rPr sz="1900">
+              <a:rPr b="1" sz="1800">
+                <a:solidFill>
+                  <a:srgbClr val="1F6FB2"/>
+                </a:solidFill>
+              </a:rPr>
+              <a:t>▪  Personal-profile re-ranking — </a:t>
+            </a:r>
+            <a:r>
+              <a:rPr sz="1800">
                 <a:solidFill>
                   <a:srgbClr val="222222"/>
                 </a:solidFill>
               </a:rPr>
-              <a:t>▪  [Switch to the running application for the live walkthrough]</a:t>
-            </a:r>
-          </a:p>
-        </p:txBody>
-      </p:sp>
-      <p:sp>
-        <p:nvSpPr>
-          <p:cNvPr id="6" name="TextBox 5"/>
-          <p:cNvSpPr txBox="1"/>
-          <p:nvPr/>
-        </p:nvSpPr>
-        <p:spPr>
-          <a:xfrm>
-            <a:off x="9692640" y="6446520"/>
-            <a:ext cx="2286000" cy="320040"/>
-          </a:xfrm>
-          <a:prstGeom prst="rect">
-            <a:avLst/>
-          </a:prstGeom>
-          <a:noFill/>
-        </p:spPr>
-        <p:txBody>
-          <a:bodyPr wrap="none">
-            <a:spAutoFit/>
-          </a:bodyPr>
-          <a:lstStyle/>
-          <a:p>
-            <a:pPr algn="r"/>
-            <a:r>
-              <a:rPr sz="1100" i="1">
-                <a:solidFill>
-                  <a:srgbClr val="6B6B6B"/>
-                </a:solidFill>
-              </a:rPr>
-              <a:t>Presented by: [Name(s)]</a:t>
+              <a:t>widens the candidate pool, deduplicates near-duplicate scheme variants (e.g. collapsing ComCare SMTA/Interim/LTA into one bucket), and diversifies across the profile's inferred categories.</a:t>
             </a:r>
           </a:p>
         </p:txBody>
@@ -5913,7 +8054,7 @@
             <a:avLst/>
           </a:prstGeom>
           <a:solidFill>
-            <a:srgbClr val="1F3A5F"/>
+            <a:srgbClr val="6B3FA0"/>
           </a:solidFill>
           <a:ln>
             <a:noFill/>
@@ -5970,7 +8111,7 @@
                   <a:srgbClr val="B9CCE0"/>
                 </a:solidFill>
               </a:rPr>
-              <a:t>2 MIN — PART 1</a:t>
+              <a:t>PART 3 OF 4 · GENERATION &amp; APPLICATION · ~1.5 MIN</a:t>
             </a:r>
           </a:p>
         </p:txBody>
@@ -6003,7 +8144,7 @@
                   <a:srgbClr val="FFFFFF"/>
                 </a:solidFill>
               </a:rPr>
-              <a:t>Evaluation Dataset &amp; Metrics</a:t>
+              <a:t>Generation &amp; Prompting Design Decisions</a:t>
             </a:r>
           </a:p>
         </p:txBody>
@@ -6011,6 +8152,40 @@
       <p:sp>
         <p:nvSpPr>
           <p:cNvPr id="5" name="TextBox 4"/>
+          <p:cNvSpPr txBox="1"/>
+          <p:nvPr/>
+        </p:nvSpPr>
+        <p:spPr>
+          <a:xfrm>
+            <a:off x="9326880" y="6446520"/>
+            <a:ext cx="2651760" cy="320040"/>
+          </a:xfrm>
+          <a:prstGeom prst="rect">
+            <a:avLst/>
+          </a:prstGeom>
+          <a:noFill/>
+        </p:spPr>
+        <p:txBody>
+          <a:bodyPr wrap="none">
+            <a:spAutoFit/>
+          </a:bodyPr>
+          <a:lstStyle/>
+          <a:p>
+            <a:pPr algn="r"/>
+            <a:r>
+              <a:rPr sz="1100" b="1" i="0">
+                <a:solidFill>
+                  <a:srgbClr val="6B3FA0"/>
+                </a:solidFill>
+              </a:rPr>
+              <a:t>● Presenter: [Name 3]</a:t>
+            </a:r>
+          </a:p>
+        </p:txBody>
+      </p:sp>
+      <p:sp>
+        <p:nvSpPr>
+          <p:cNvPr id="6" name="TextBox 5"/>
           <p:cNvSpPr txBox="1"/>
           <p:nvPr/>
         </p:nvSpPr>
@@ -6041,10 +8216,10 @@
             <a:r>
               <a:rPr b="1" sz="1800">
                 <a:solidFill>
-                  <a:srgbClr val="1F3A5F"/>
-                </a:solidFill>
-              </a:rPr>
-              <a:t>▪  15-question test set — </a:t>
+                  <a:srgbClr val="6B3FA0"/>
+                </a:solidFill>
+              </a:rPr>
+              <a:t>▪  Agentic pipeline — </a:t>
             </a:r>
             <a:r>
               <a:rPr sz="1800">
@@ -6052,7 +8227,7 @@
                   <a:srgbClr val="222222"/>
                 </a:solidFill>
               </a:rPr>
-              <a:t>Factual (F1–F3), Paraphrase (P1–P3), Multi-document (M1–M2), Unanswerable (U1–U2), Ambiguous (A1–A2), Personal profile (PR1–PR3).</a:t>
+              <a:t>a query-rewrite agent, a personal-situation intent router, a profile-extraction agent, and an eligibility-shortlist assessor sit between retrieval and the final answer.</a:t>
             </a:r>
           </a:p>
           <a:p>
@@ -6067,10 +8242,10 @@
             <a:r>
               <a:rPr b="1" sz="1800">
                 <a:solidFill>
-                  <a:srgbClr val="1F3A5F"/>
-                </a:solidFill>
-              </a:rPr>
-              <a:t>▪  8 questions hand-labelled</a:t>
+                  <a:srgbClr val="6B3FA0"/>
+                </a:solidFill>
+              </a:rPr>
+              <a:t>▪  Prompt design — </a:t>
             </a:r>
             <a:r>
               <a:rPr sz="1800">
@@ -6078,7 +8253,7 @@
                   <a:srgbClr val="222222"/>
                 </a:solidFill>
               </a:rPr>
-              <a:t>with ground-truth chunk(s) for retrieval scoring.</a:t>
+              <a:t>the model must answer using only the supplied context, cite every claim as [scheme, section/page], and use an exact fallback sentence when evidence is insufficient.</a:t>
             </a:r>
           </a:p>
           <a:p>
@@ -6093,10 +8268,10 @@
             <a:r>
               <a:rPr b="1" sz="1800">
                 <a:solidFill>
-                  <a:srgbClr val="1F3A5F"/>
-                </a:solidFill>
-              </a:rPr>
-              <a:t>▪  3 retrieval measures — </a:t>
+                  <a:srgbClr val="6B3FA0"/>
+                </a:solidFill>
+              </a:rPr>
+              <a:t>▪  Deterministic grounding safeguard — </a:t>
             </a:r>
             <a:r>
               <a:rPr sz="1800">
@@ -6104,7 +8279,7 @@
                   <a:srgbClr val="222222"/>
                 </a:solidFill>
               </a:rPr>
-              <a:t>Hit Rate, Recall@5, Mean Reciprocal Rank (MRR).</a:t>
+              <a:t>the eligible/unclear/not_assessed bucket for each scheme is derived in code from structured conditions — never taken from the model's own prose.</a:t>
             </a:r>
           </a:p>
           <a:p>
@@ -6119,10 +8294,10 @@
             <a:r>
               <a:rPr b="1" sz="1800">
                 <a:solidFill>
-                  <a:srgbClr val="1F3A5F"/>
-                </a:solidFill>
-              </a:rPr>
-              <a:t>▪  1 answer-quality measure — </a:t>
+                  <a:srgbClr val="6B3FA0"/>
+                </a:solidFill>
+              </a:rPr>
+              <a:t>▪  Safety &amp; citations — </a:t>
             </a:r>
             <a:r>
               <a:rPr sz="1800">
@@ -6130,67 +8305,7 @@
                   <a:srgbClr val="222222"/>
                 </a:solidFill>
               </a:rPr>
-              <a:t>structured 0–2 rubric across Correctness, Faithfulness, Citation accuracy.</a:t>
-            </a:r>
-          </a:p>
-          <a:p>
-            <a:pPr>
-              <a:lnSpc>
-                <a:spcPct val="115000"/>
-              </a:lnSpc>
-              <a:spcAft>
-                <a:spcPts val="1200"/>
-              </a:spcAft>
-            </a:pPr>
-            <a:r>
-              <a:rPr b="1" sz="1800">
-                <a:solidFill>
-                  <a:srgbClr val="1F3A5F"/>
-                </a:solidFill>
-              </a:rPr>
-              <a:t>▪  Run config — </a:t>
-            </a:r>
-            <a:r>
-              <a:rPr sz="1800">
-                <a:solidFill>
-                  <a:srgbClr val="222222"/>
-                </a:solidFill>
-              </a:rPr>
-              <a:t>gpt-5.4-mini, BAAI/bge-m3 embeddings, top_k=5, query rewrite off (to isolate the retrieval-mode comparison).</a:t>
-            </a:r>
-          </a:p>
-        </p:txBody>
-      </p:sp>
-      <p:sp>
-        <p:nvSpPr>
-          <p:cNvPr id="6" name="TextBox 5"/>
-          <p:cNvSpPr txBox="1"/>
-          <p:nvPr/>
-        </p:nvSpPr>
-        <p:spPr>
-          <a:xfrm>
-            <a:off x="9692640" y="6446520"/>
-            <a:ext cx="2286000" cy="320040"/>
-          </a:xfrm>
-          <a:prstGeom prst="rect">
-            <a:avLst/>
-          </a:prstGeom>
-          <a:noFill/>
-        </p:spPr>
-        <p:txBody>
-          <a:bodyPr wrap="none">
-            <a:spAutoFit/>
-          </a:bodyPr>
-          <a:lstStyle/>
-          <a:p>
-            <a:pPr algn="r"/>
-            <a:r>
-              <a:rPr sz="1100" i="1">
-                <a:solidFill>
-                  <a:srgbClr val="6B6B6B"/>
-                </a:solidFill>
-              </a:rPr>
-              <a:t>Presented by: [Name]</a:t>
+              <a:t>NRIC/FIN-shaped identifiers are redacted before any query reaches an LLM; every citation is validated against the retrieved set before being shown to the resident.</a:t>
             </a:r>
           </a:p>
         </p:txBody>
@@ -6236,7 +8351,7 @@
             <a:avLst/>
           </a:prstGeom>
           <a:solidFill>
-            <a:srgbClr val="1F3A5F"/>
+            <a:srgbClr val="6B3FA0"/>
           </a:solidFill>
           <a:ln>
             <a:noFill/>
@@ -6293,7 +8408,7 @@
                   <a:srgbClr val="B9CCE0"/>
                 </a:solidFill>
               </a:rPr>
-              <a:t>2 MIN — PART 2</a:t>
+              <a:t>PART 3 OF 4 · GENERATION &amp; APPLICATION · ~3 MIN</a:t>
             </a:r>
           </a:p>
         </p:txBody>
@@ -6326,669 +8441,45 @@
                   <a:srgbClr val="FFFFFF"/>
                 </a:solidFill>
               </a:rPr>
-              <a:t>Baseline (Dense) vs. Improved (Hybrid) Results</a:t>
-            </a:r>
-          </a:p>
-        </p:txBody>
-      </p:sp>
-      <p:graphicFrame>
-        <p:nvGraphicFramePr>
-          <p:cNvPr id="5" name="Table 4"/>
-          <p:cNvGraphicFramePr>
-            <a:graphicFrameLocks noGrp="1"/>
-          </p:cNvGraphicFramePr>
+              <a:t>Live Demonstration</a:t>
+            </a:r>
+          </a:p>
+        </p:txBody>
+      </p:sp>
+      <p:sp>
+        <p:nvSpPr>
+          <p:cNvPr id="5" name="TextBox 4"/>
+          <p:cNvSpPr txBox="1"/>
           <p:nvPr/>
-        </p:nvGraphicFramePr>
-        <p:xfrm>
-          <a:off x="1645920" y="1554480"/>
-          <a:ext cx="8869680" cy="3291840"/>
-        </p:xfrm>
-        <a:graphic>
-          <a:graphicData uri="http://schemas.openxmlformats.org/drawingml/2006/table">
-            <a:tbl>
-              <a:tblPr firstRow="1" bandRow="1">
-                <a:tableStyleId>{5C22544A-7EE6-4342-B048-85BDC9FD1C3A}</a:tableStyleId>
-              </a:tblPr>
-              <a:tblGrid>
-                <a:gridCol w="3017520"/>
-                <a:gridCol w="1828800"/>
-                <a:gridCol w="1828800"/>
-                <a:gridCol w="2194560"/>
-              </a:tblGrid>
-              <a:tr h="470262">
-                <a:tc>
-                  <a:txBody>
-                    <a:bodyPr/>
-                    <a:lstStyle/>
-                    <a:p>
-                      <a:pPr algn="ctr"/>
-                      <a:r>
-                        <a:rPr b="1" sz="1500">
-                          <a:solidFill>
-                            <a:srgbClr val="FFFFFF"/>
-                          </a:solidFill>
-                        </a:rPr>
-                        <a:t>Metric</a:t>
-                      </a:r>
-                    </a:p>
-                  </a:txBody>
-                  <a:tcPr>
-                    <a:solidFill>
-                      <a:srgbClr val="1F3A5F"/>
-                    </a:solidFill>
-                  </a:tcPr>
-                </a:tc>
-                <a:tc>
-                  <a:txBody>
-                    <a:bodyPr/>
-                    <a:lstStyle/>
-                    <a:p>
-                      <a:pPr algn="ctr"/>
-                      <a:r>
-                        <a:rPr b="1" sz="1500">
-                          <a:solidFill>
-                            <a:srgbClr val="FFFFFF"/>
-                          </a:solidFill>
-                        </a:rPr>
-                        <a:t>Dense</a:t>
-                      </a:r>
-                    </a:p>
-                  </a:txBody>
-                  <a:tcPr>
-                    <a:solidFill>
-                      <a:srgbClr val="1F3A5F"/>
-                    </a:solidFill>
-                  </a:tcPr>
-                </a:tc>
-                <a:tc>
-                  <a:txBody>
-                    <a:bodyPr/>
-                    <a:lstStyle/>
-                    <a:p>
-                      <a:pPr algn="ctr"/>
-                      <a:r>
-                        <a:rPr b="1" sz="1500">
-                          <a:solidFill>
-                            <a:srgbClr val="FFFFFF"/>
-                          </a:solidFill>
-                        </a:rPr>
-                        <a:t>Hybrid</a:t>
-                      </a:r>
-                    </a:p>
-                  </a:txBody>
-                  <a:tcPr>
-                    <a:solidFill>
-                      <a:srgbClr val="1F3A5F"/>
-                    </a:solidFill>
-                  </a:tcPr>
-                </a:tc>
-                <a:tc>
-                  <a:txBody>
-                    <a:bodyPr/>
-                    <a:lstStyle/>
-                    <a:p>
-                      <a:pPr algn="ctr"/>
-                      <a:r>
-                        <a:rPr b="1" sz="1500">
-                          <a:solidFill>
-                            <a:srgbClr val="FFFFFF"/>
-                          </a:solidFill>
-                        </a:rPr>
-                        <a:t>Δ</a:t>
-                      </a:r>
-                    </a:p>
-                  </a:txBody>
-                  <a:tcPr>
-                    <a:solidFill>
-                      <a:srgbClr val="1F3A5F"/>
-                    </a:solidFill>
-                  </a:tcPr>
-                </a:tc>
-              </a:tr>
-              <a:tr h="470262">
-                <a:tc>
-                  <a:txBody>
-                    <a:bodyPr/>
-                    <a:lstStyle/>
-                    <a:p>
-                      <a:pPr algn="ctr"/>
-                      <a:r>
-                        <a:rPr sz="1500">
-                          <a:solidFill>
-                            <a:srgbClr val="222222"/>
-                          </a:solidFill>
-                        </a:rPr>
-                        <a:t>Hit rate</a:t>
-                      </a:r>
-                    </a:p>
-                  </a:txBody>
-                  <a:tcPr>
-                    <a:solidFill>
-                      <a:srgbClr val="FFFFFF"/>
-                    </a:solidFill>
-                  </a:tcPr>
-                </a:tc>
-                <a:tc>
-                  <a:txBody>
-                    <a:bodyPr/>
-                    <a:lstStyle/>
-                    <a:p>
-                      <a:pPr algn="ctr"/>
-                      <a:r>
-                        <a:rPr sz="1500">
-                          <a:solidFill>
-                            <a:srgbClr val="222222"/>
-                          </a:solidFill>
-                        </a:rPr>
-                        <a:t>25.0%</a:t>
-                      </a:r>
-                    </a:p>
-                  </a:txBody>
-                  <a:tcPr>
-                    <a:solidFill>
-                      <a:srgbClr val="FFFFFF"/>
-                    </a:solidFill>
-                  </a:tcPr>
-                </a:tc>
-                <a:tc>
-                  <a:txBody>
-                    <a:bodyPr/>
-                    <a:lstStyle/>
-                    <a:p>
-                      <a:pPr algn="ctr"/>
-                      <a:r>
-                        <a:rPr sz="1500">
-                          <a:solidFill>
-                            <a:srgbClr val="222222"/>
-                          </a:solidFill>
-                        </a:rPr>
-                        <a:t>37.5%</a:t>
-                      </a:r>
-                    </a:p>
-                  </a:txBody>
-                  <a:tcPr>
-                    <a:solidFill>
-                      <a:srgbClr val="FFFFFF"/>
-                    </a:solidFill>
-                  </a:tcPr>
-                </a:tc>
-                <a:tc>
-                  <a:txBody>
-                    <a:bodyPr/>
-                    <a:lstStyle/>
-                    <a:p>
-                      <a:pPr algn="ctr"/>
-                      <a:r>
-                        <a:rPr sz="1500">
-                          <a:solidFill>
-                            <a:srgbClr val="222222"/>
-                          </a:solidFill>
-                        </a:rPr>
-                        <a:t>+12.5 pp</a:t>
-                      </a:r>
-                    </a:p>
-                  </a:txBody>
-                  <a:tcPr>
-                    <a:solidFill>
-                      <a:srgbClr val="FFFFFF"/>
-                    </a:solidFill>
-                  </a:tcPr>
-                </a:tc>
-              </a:tr>
-              <a:tr h="470262">
-                <a:tc>
-                  <a:txBody>
-                    <a:bodyPr/>
-                    <a:lstStyle/>
-                    <a:p>
-                      <a:pPr algn="ctr"/>
-                      <a:r>
-                        <a:rPr sz="1500">
-                          <a:solidFill>
-                            <a:srgbClr val="222222"/>
-                          </a:solidFill>
-                        </a:rPr>
-                        <a:t>Recall@5</a:t>
-                      </a:r>
-                    </a:p>
-                  </a:txBody>
-                  <a:tcPr>
-                    <a:solidFill>
-                      <a:srgbClr val="E9EEF4"/>
-                    </a:solidFill>
-                  </a:tcPr>
-                </a:tc>
-                <a:tc>
-                  <a:txBody>
-                    <a:bodyPr/>
-                    <a:lstStyle/>
-                    <a:p>
-                      <a:pPr algn="ctr"/>
-                      <a:r>
-                        <a:rPr sz="1500">
-                          <a:solidFill>
-                            <a:srgbClr val="222222"/>
-                          </a:solidFill>
-                        </a:rPr>
-                        <a:t>18.8%</a:t>
-                      </a:r>
-                    </a:p>
-                  </a:txBody>
-                  <a:tcPr>
-                    <a:solidFill>
-                      <a:srgbClr val="E9EEF4"/>
-                    </a:solidFill>
-                  </a:tcPr>
-                </a:tc>
-                <a:tc>
-                  <a:txBody>
-                    <a:bodyPr/>
-                    <a:lstStyle/>
-                    <a:p>
-                      <a:pPr algn="ctr"/>
-                      <a:r>
-                        <a:rPr sz="1500">
-                          <a:solidFill>
-                            <a:srgbClr val="222222"/>
-                          </a:solidFill>
-                        </a:rPr>
-                        <a:t>31.2%</a:t>
-                      </a:r>
-                    </a:p>
-                  </a:txBody>
-                  <a:tcPr>
-                    <a:solidFill>
-                      <a:srgbClr val="E9EEF4"/>
-                    </a:solidFill>
-                  </a:tcPr>
-                </a:tc>
-                <a:tc>
-                  <a:txBody>
-                    <a:bodyPr/>
-                    <a:lstStyle/>
-                    <a:p>
-                      <a:pPr algn="ctr"/>
-                      <a:r>
-                        <a:rPr sz="1500">
-                          <a:solidFill>
-                            <a:srgbClr val="222222"/>
-                          </a:solidFill>
-                        </a:rPr>
-                        <a:t>+12.5 pp</a:t>
-                      </a:r>
-                    </a:p>
-                  </a:txBody>
-                  <a:tcPr>
-                    <a:solidFill>
-                      <a:srgbClr val="E9EEF4"/>
-                    </a:solidFill>
-                  </a:tcPr>
-                </a:tc>
-              </a:tr>
-              <a:tr h="470262">
-                <a:tc>
-                  <a:txBody>
-                    <a:bodyPr/>
-                    <a:lstStyle/>
-                    <a:p>
-                      <a:pPr algn="ctr"/>
-                      <a:r>
-                        <a:rPr sz="1500">
-                          <a:solidFill>
-                            <a:srgbClr val="222222"/>
-                          </a:solidFill>
-                        </a:rPr>
-                        <a:t>MRR</a:t>
-                      </a:r>
-                    </a:p>
-                  </a:txBody>
-                  <a:tcPr>
-                    <a:solidFill>
-                      <a:srgbClr val="FFFFFF"/>
-                    </a:solidFill>
-                  </a:tcPr>
-                </a:tc>
-                <a:tc>
-                  <a:txBody>
-                    <a:bodyPr/>
-                    <a:lstStyle/>
-                    <a:p>
-                      <a:pPr algn="ctr"/>
-                      <a:r>
-                        <a:rPr sz="1500">
-                          <a:solidFill>
-                            <a:srgbClr val="222222"/>
-                          </a:solidFill>
-                        </a:rPr>
-                        <a:t>0.250</a:t>
-                      </a:r>
-                    </a:p>
-                  </a:txBody>
-                  <a:tcPr>
-                    <a:solidFill>
-                      <a:srgbClr val="FFFFFF"/>
-                    </a:solidFill>
-                  </a:tcPr>
-                </a:tc>
-                <a:tc>
-                  <a:txBody>
-                    <a:bodyPr/>
-                    <a:lstStyle/>
-                    <a:p>
-                      <a:pPr algn="ctr"/>
-                      <a:r>
-                        <a:rPr sz="1500">
-                          <a:solidFill>
-                            <a:srgbClr val="222222"/>
-                          </a:solidFill>
-                        </a:rPr>
-                        <a:t>0.219</a:t>
-                      </a:r>
-                    </a:p>
-                  </a:txBody>
-                  <a:tcPr>
-                    <a:solidFill>
-                      <a:srgbClr val="FFFFFF"/>
-                    </a:solidFill>
-                  </a:tcPr>
-                </a:tc>
-                <a:tc>
-                  <a:txBody>
-                    <a:bodyPr/>
-                    <a:lstStyle/>
-                    <a:p>
-                      <a:pPr algn="ctr"/>
-                      <a:r>
-                        <a:rPr sz="1500">
-                          <a:solidFill>
-                            <a:srgbClr val="222222"/>
-                          </a:solidFill>
-                        </a:rPr>
-                        <a:t>−0.031</a:t>
-                      </a:r>
-                    </a:p>
-                  </a:txBody>
-                  <a:tcPr>
-                    <a:solidFill>
-                      <a:srgbClr val="FFFFFF"/>
-                    </a:solidFill>
-                  </a:tcPr>
-                </a:tc>
-              </a:tr>
-              <a:tr h="470262">
-                <a:tc>
-                  <a:txBody>
-                    <a:bodyPr/>
-                    <a:lstStyle/>
-                    <a:p>
-                      <a:pPr algn="ctr"/>
-                      <a:r>
-                        <a:rPr sz="1500">
-                          <a:solidFill>
-                            <a:srgbClr val="222222"/>
-                          </a:solidFill>
-                        </a:rPr>
-                        <a:t>Correctness (mean)</a:t>
-                      </a:r>
-                    </a:p>
-                  </a:txBody>
-                  <a:tcPr>
-                    <a:solidFill>
-                      <a:srgbClr val="E9EEF4"/>
-                    </a:solidFill>
-                  </a:tcPr>
-                </a:tc>
-                <a:tc>
-                  <a:txBody>
-                    <a:bodyPr/>
-                    <a:lstStyle/>
-                    <a:p>
-                      <a:pPr algn="ctr"/>
-                      <a:r>
-                        <a:rPr sz="1500">
-                          <a:solidFill>
-                            <a:srgbClr val="222222"/>
-                          </a:solidFill>
-                        </a:rPr>
-                        <a:t>1.27</a:t>
-                      </a:r>
-                    </a:p>
-                  </a:txBody>
-                  <a:tcPr>
-                    <a:solidFill>
-                      <a:srgbClr val="E9EEF4"/>
-                    </a:solidFill>
-                  </a:tcPr>
-                </a:tc>
-                <a:tc>
-                  <a:txBody>
-                    <a:bodyPr/>
-                    <a:lstStyle/>
-                    <a:p>
-                      <a:pPr algn="ctr"/>
-                      <a:r>
-                        <a:rPr sz="1500">
-                          <a:solidFill>
-                            <a:srgbClr val="222222"/>
-                          </a:solidFill>
-                        </a:rPr>
-                        <a:t>1.40</a:t>
-                      </a:r>
-                    </a:p>
-                  </a:txBody>
-                  <a:tcPr>
-                    <a:solidFill>
-                      <a:srgbClr val="E9EEF4"/>
-                    </a:solidFill>
-                  </a:tcPr>
-                </a:tc>
-                <a:tc>
-                  <a:txBody>
-                    <a:bodyPr/>
-                    <a:lstStyle/>
-                    <a:p>
-                      <a:pPr algn="ctr"/>
-                      <a:r>
-                        <a:rPr sz="1500">
-                          <a:solidFill>
-                            <a:srgbClr val="222222"/>
-                          </a:solidFill>
-                        </a:rPr>
-                        <a:t>+0.13</a:t>
-                      </a:r>
-                    </a:p>
-                  </a:txBody>
-                  <a:tcPr>
-                    <a:solidFill>
-                      <a:srgbClr val="E9EEF4"/>
-                    </a:solidFill>
-                  </a:tcPr>
-                </a:tc>
-              </a:tr>
-              <a:tr h="470262">
-                <a:tc>
-                  <a:txBody>
-                    <a:bodyPr/>
-                    <a:lstStyle/>
-                    <a:p>
-                      <a:pPr algn="ctr"/>
-                      <a:r>
-                        <a:rPr sz="1500">
-                          <a:solidFill>
-                            <a:srgbClr val="222222"/>
-                          </a:solidFill>
-                        </a:rPr>
-                        <a:t>Faithfulness (mean)</a:t>
-                      </a:r>
-                    </a:p>
-                  </a:txBody>
-                  <a:tcPr>
-                    <a:solidFill>
-                      <a:srgbClr val="FFFFFF"/>
-                    </a:solidFill>
-                  </a:tcPr>
-                </a:tc>
-                <a:tc>
-                  <a:txBody>
-                    <a:bodyPr/>
-                    <a:lstStyle/>
-                    <a:p>
-                      <a:pPr algn="ctr"/>
-                      <a:r>
-                        <a:rPr sz="1500">
-                          <a:solidFill>
-                            <a:srgbClr val="222222"/>
-                          </a:solidFill>
-                        </a:rPr>
-                        <a:t>1.73</a:t>
-                      </a:r>
-                    </a:p>
-                  </a:txBody>
-                  <a:tcPr>
-                    <a:solidFill>
-                      <a:srgbClr val="FFFFFF"/>
-                    </a:solidFill>
-                  </a:tcPr>
-                </a:tc>
-                <a:tc>
-                  <a:txBody>
-                    <a:bodyPr/>
-                    <a:lstStyle/>
-                    <a:p>
-                      <a:pPr algn="ctr"/>
-                      <a:r>
-                        <a:rPr sz="1500">
-                          <a:solidFill>
-                            <a:srgbClr val="222222"/>
-                          </a:solidFill>
-                        </a:rPr>
-                        <a:t>1.47</a:t>
-                      </a:r>
-                    </a:p>
-                  </a:txBody>
-                  <a:tcPr>
-                    <a:solidFill>
-                      <a:srgbClr val="FFFFFF"/>
-                    </a:solidFill>
-                  </a:tcPr>
-                </a:tc>
-                <a:tc>
-                  <a:txBody>
-                    <a:bodyPr/>
-                    <a:lstStyle/>
-                    <a:p>
-                      <a:pPr algn="ctr"/>
-                      <a:r>
-                        <a:rPr sz="1500">
-                          <a:solidFill>
-                            <a:srgbClr val="222222"/>
-                          </a:solidFill>
-                        </a:rPr>
-                        <a:t>−0.26</a:t>
-                      </a:r>
-                    </a:p>
-                  </a:txBody>
-                  <a:tcPr>
-                    <a:solidFill>
-                      <a:srgbClr val="FFFFFF"/>
-                    </a:solidFill>
-                  </a:tcPr>
-                </a:tc>
-              </a:tr>
-              <a:tr h="470268">
-                <a:tc>
-                  <a:txBody>
-                    <a:bodyPr/>
-                    <a:lstStyle/>
-                    <a:p>
-                      <a:pPr algn="ctr"/>
-                      <a:r>
-                        <a:rPr sz="1500">
-                          <a:solidFill>
-                            <a:srgbClr val="222222"/>
-                          </a:solidFill>
-                        </a:rPr>
-                        <a:t>Citation accuracy (mean)</a:t>
-                      </a:r>
-                    </a:p>
-                  </a:txBody>
-                  <a:tcPr>
-                    <a:solidFill>
-                      <a:srgbClr val="E9EEF4"/>
-                    </a:solidFill>
-                  </a:tcPr>
-                </a:tc>
-                <a:tc>
-                  <a:txBody>
-                    <a:bodyPr/>
-                    <a:lstStyle/>
-                    <a:p>
-                      <a:pPr algn="ctr"/>
-                      <a:r>
-                        <a:rPr sz="1500">
-                          <a:solidFill>
-                            <a:srgbClr val="222222"/>
-                          </a:solidFill>
-                        </a:rPr>
-                        <a:t>1.80</a:t>
-                      </a:r>
-                    </a:p>
-                  </a:txBody>
-                  <a:tcPr>
-                    <a:solidFill>
-                      <a:srgbClr val="E9EEF4"/>
-                    </a:solidFill>
-                  </a:tcPr>
-                </a:tc>
-                <a:tc>
-                  <a:txBody>
-                    <a:bodyPr/>
-                    <a:lstStyle/>
-                    <a:p>
-                      <a:pPr algn="ctr"/>
-                      <a:r>
-                        <a:rPr sz="1500">
-                          <a:solidFill>
-                            <a:srgbClr val="222222"/>
-                          </a:solidFill>
-                        </a:rPr>
-                        <a:t>1.80</a:t>
-                      </a:r>
-                    </a:p>
-                  </a:txBody>
-                  <a:tcPr>
-                    <a:solidFill>
-                      <a:srgbClr val="E9EEF4"/>
-                    </a:solidFill>
-                  </a:tcPr>
-                </a:tc>
-                <a:tc>
-                  <a:txBody>
-                    <a:bodyPr/>
-                    <a:lstStyle/>
-                    <a:p>
-                      <a:pPr algn="ctr"/>
-                      <a:r>
-                        <a:rPr sz="1500">
-                          <a:solidFill>
-                            <a:srgbClr val="222222"/>
-                          </a:solidFill>
-                        </a:rPr>
-                        <a:t>0.00</a:t>
-                      </a:r>
-                    </a:p>
-                  </a:txBody>
-                  <a:tcPr>
-                    <a:solidFill>
-                      <a:srgbClr val="E9EEF4"/>
-                    </a:solidFill>
-                  </a:tcPr>
-                </a:tc>
-              </a:tr>
-            </a:tbl>
-          </a:graphicData>
-        </a:graphic>
-      </p:graphicFrame>
+        </p:nvSpPr>
+        <p:spPr>
+          <a:xfrm>
+            <a:off x="9326880" y="6446520"/>
+            <a:ext cx="2651760" cy="320040"/>
+          </a:xfrm>
+          <a:prstGeom prst="rect">
+            <a:avLst/>
+          </a:prstGeom>
+          <a:noFill/>
+        </p:spPr>
+        <p:txBody>
+          <a:bodyPr wrap="none">
+            <a:spAutoFit/>
+          </a:bodyPr>
+          <a:lstStyle/>
+          <a:p>
+            <a:pPr algn="r"/>
+            <a:r>
+              <a:rPr sz="1100" b="1" i="0">
+                <a:solidFill>
+                  <a:srgbClr val="6B3FA0"/>
+                </a:solidFill>
+              </a:rPr>
+              <a:t>● Presenter: [Name 3]</a:t>
+            </a:r>
+          </a:p>
+        </p:txBody>
+      </p:sp>
       <p:sp>
         <p:nvSpPr>
           <p:cNvPr id="6" name="TextBox 5"/>
@@ -6997,8 +8488,8 @@
         </p:nvSpPr>
         <p:spPr>
           <a:xfrm>
-            <a:off x="640080" y="5074920"/>
-            <a:ext cx="10881360" cy="1554480"/>
+            <a:off x="640080" y="1463040"/>
+            <a:ext cx="10881360" cy="4754880"/>
           </a:xfrm>
           <a:prstGeom prst="rect">
             <a:avLst/>
@@ -7020,20 +8511,20 @@
               </a:spcAft>
             </a:pPr>
             <a:r>
-              <a:rPr b="1" sz="1550">
-                <a:solidFill>
-                  <a:srgbClr val="1F3A5F"/>
-                </a:solidFill>
-              </a:rPr>
-              <a:t>▪  What changed — </a:t>
-            </a:r>
-            <a:r>
-              <a:rPr sz="1550">
+              <a:rPr b="1" sz="1900">
+                <a:solidFill>
+                  <a:srgbClr val="6B3FA0"/>
+                </a:solidFill>
+              </a:rPr>
+              <a:t>▪  General Q&amp;A example — </a:t>
+            </a:r>
+            <a:r>
+              <a:rPr sz="1900">
                 <a:solidFill>
                   <a:srgbClr val="222222"/>
                 </a:solidFill>
               </a:rPr>
-              <a:t>added BM25 keyword search fused with dense retrieval via Reciprocal Rank Fusion, to catch distinctive keywords/amounts dense embeddings dilute.</a:t>
+              <a:t>“How much does each eligible Singaporean household get from CDC Vouchers?” — grounded answer with [scheme, section] citation.</a:t>
             </a:r>
           </a:p>
           <a:p>
@@ -7046,54 +8537,64 @@
               </a:spcAft>
             </a:pPr>
             <a:r>
-              <a:rPr b="1" sz="1550">
-                <a:solidFill>
-                  <a:srgbClr val="1F3A5F"/>
-                </a:solidFill>
-              </a:rPr>
-              <a:t>▪  Trade-off — </a:t>
-            </a:r>
-            <a:r>
-              <a:rPr sz="1550">
+              <a:rPr b="1" sz="1900">
+                <a:solidFill>
+                  <a:srgbClr val="6B3FA0"/>
+                </a:solidFill>
+              </a:rPr>
+              <a:t>▪  Personal Eligibility Shortlist example — </a:t>
+            </a:r>
+            <a:r>
+              <a:rPr sz="1900">
                 <a:solidFill>
                   <a:srgbClr val="222222"/>
                 </a:solidFill>
               </a:rPr>
-              <a:t>hybrid retrieves the right evidence more often, but is less strictly grounded when it does answer — and ranks correct hits slightly later on average.</a:t>
-            </a:r>
-          </a:p>
-        </p:txBody>
-      </p:sp>
-      <p:sp>
-        <p:nvSpPr>
-          <p:cNvPr id="7" name="TextBox 6"/>
-          <p:cNvSpPr txBox="1"/>
-          <p:nvPr/>
-        </p:nvSpPr>
-        <p:spPr>
-          <a:xfrm>
-            <a:off x="9692640" y="6446520"/>
-            <a:ext cx="2286000" cy="320040"/>
-          </a:xfrm>
-          <a:prstGeom prst="rect">
-            <a:avLst/>
-          </a:prstGeom>
-          <a:noFill/>
-        </p:spPr>
-        <p:txBody>
-          <a:bodyPr wrap="none">
-            <a:spAutoFit/>
-          </a:bodyPr>
-          <a:lstStyle/>
-          <a:p>
-            <a:pPr algn="r"/>
-            <a:r>
-              <a:rPr sz="1100" i="1">
-                <a:solidFill>
-                  <a:srgbClr val="6B6B6B"/>
-                </a:solidFill>
-              </a:rPr>
-              <a:t>Presented by: [Name]</a:t>
+              <a:t>Profile: Singapore Citizen, age 68, HDB flat, retired — shortlist surfaces Silver Support and cost-of-living schemes as “Possibly eligible” with per-condition reasoning.</a:t>
+            </a:r>
+          </a:p>
+          <a:p>
+            <a:pPr>
+              <a:lnSpc>
+                <a:spcPct val="115000"/>
+              </a:lnSpc>
+              <a:spcAft>
+                <a:spcPts val="1200"/>
+              </a:spcAft>
+            </a:pPr>
+            <a:r>
+              <a:rPr b="1" sz="1900">
+                <a:solidFill>
+                  <a:srgbClr val="6B3FA0"/>
+                </a:solidFill>
+              </a:rPr>
+              <a:t>▪  Unanswerable question example — </a:t>
+            </a:r>
+            <a:r>
+              <a:rPr sz="1900">
+                <a:solidFill>
+                  <a:srgbClr val="222222"/>
+                </a:solidFill>
+              </a:rPr>
+              <a:t>“Can I use my CDC Vouchers to pay my IRAS income tax bill?” — correctly triggers the fallback message instead of guessing.</a:t>
+            </a:r>
+          </a:p>
+          <a:p>
+            <a:pPr>
+              <a:lnSpc>
+                <a:spcPct val="115000"/>
+              </a:lnSpc>
+              <a:spcAft>
+                <a:spcPts val="1200"/>
+              </a:spcAft>
+            </a:pPr>
+            <a:r>
+              <a:rPr sz="1900">
+                <a:solidFill>
+                  <a:srgbClr val="222222"/>
+                </a:solidFill>
+              </a:rPr>
+              <a:t>▪  [Switch to the running application for the live walkthrough]</a:t>
             </a:r>
           </a:p>
         </p:txBody>
@@ -7139,7 +8640,7 @@
             <a:avLst/>
           </a:prstGeom>
           <a:solidFill>
-            <a:srgbClr val="1F3A5F"/>
+            <a:srgbClr val="B2691F"/>
           </a:solidFill>
           <a:ln>
             <a:noFill/>
@@ -7196,7 +8697,7 @@
                   <a:srgbClr val="B9CCE0"/>
                 </a:solidFill>
               </a:rPr>
-              <a:t>INCLUDED IN EVALUATION RESULTS</a:t>
+              <a:t>PART 4 OF 4 · EVALUATION &amp; TESTING · ~1 MIN</a:t>
             </a:r>
           </a:p>
         </p:txBody>
@@ -7229,7 +8730,7 @@
                   <a:srgbClr val="FFFFFF"/>
                 </a:solidFill>
               </a:rPr>
-              <a:t>Failure Case Analysis</a:t>
+              <a:t>Evaluation Dataset &amp; Metrics</a:t>
             </a:r>
           </a:p>
         </p:txBody>
@@ -7242,7 +8743,41 @@
         </p:nvSpPr>
         <p:spPr>
           <a:xfrm>
-            <a:off x="640080" y="1463040"/>
+            <a:off x="9326880" y="6446520"/>
+            <a:ext cx="2651760" cy="320040"/>
+          </a:xfrm>
+          <a:prstGeom prst="rect">
+            <a:avLst/>
+          </a:prstGeom>
+          <a:noFill/>
+        </p:spPr>
+        <p:txBody>
+          <a:bodyPr wrap="none">
+            <a:spAutoFit/>
+          </a:bodyPr>
+          <a:lstStyle/>
+          <a:p>
+            <a:pPr algn="r"/>
+            <a:r>
+              <a:rPr sz="1100" b="1" i="0">
+                <a:solidFill>
+                  <a:srgbClr val="B2691F"/>
+                </a:solidFill>
+              </a:rPr>
+              <a:t>● Presenter: [Name 4]</a:t>
+            </a:r>
+          </a:p>
+        </p:txBody>
+      </p:sp>
+      <p:sp>
+        <p:nvSpPr>
+          <p:cNvPr id="6" name="TextBox 5"/>
+          <p:cNvSpPr txBox="1"/>
+          <p:nvPr/>
+        </p:nvSpPr>
+        <p:spPr>
+          <a:xfrm>
+            <a:off x="640080" y="1417320"/>
             <a:ext cx="10881360" cy="4846320"/>
           </a:xfrm>
           <a:prstGeom prst="rect">
@@ -7267,10 +8802,10 @@
             <a:r>
               <a:rPr b="1" sz="1700">
                 <a:solidFill>
-                  <a:srgbClr val="1F3A5F"/>
-                </a:solidFill>
-              </a:rPr>
-              <a:t>▪  PR3 — citizenship hallucination: </a:t>
+                  <a:srgbClr val="B2691F"/>
+                </a:solidFill>
+              </a:rPr>
+              <a:t>▪  15-question test set — </a:t>
             </a:r>
             <a:r>
               <a:rPr sz="1700">
@@ -7278,7 +8813,7 @@
                   <a:srgbClr val="222222"/>
                 </a:solidFill>
               </a:rPr>
-              <a:t>hybrid's reason text asserted “Singapore Citizen” for a profile explicitly marked PR — a generation/grounding failure, since bucket logic only reads structured conditions.</a:t>
+              <a:t>Factual (F1–F3), Paraphrase (P1–P3), Multi-document (M1–M2), Unanswerable (U1–U2), Ambiguous (A1–A2), Personal profile (PR1–PR3).</a:t>
             </a:r>
           </a:p>
           <a:p>
@@ -7293,10 +8828,10 @@
             <a:r>
               <a:rPr b="1" sz="1700">
                 <a:solidFill>
-                  <a:srgbClr val="1F3A5F"/>
-                </a:solidFill>
-              </a:rPr>
-              <a:t>▪  P1/P2 — paraphrase misrouting: </a:t>
+                  <a:srgbClr val="B2691F"/>
+                </a:solidFill>
+              </a:rPr>
+              <a:t>▪  8 questions hand-labelled</a:t>
             </a:r>
             <a:r>
               <a:rPr sz="1700">
@@ -7304,7 +8839,7 @@
                   <a:srgbClr val="222222"/>
                 </a:solidFill>
               </a:rPr>
-              <a:t>“my mother” / “working mum” tax questions were routed into the eligibility-shortlist path instead of IRAS Parent Relief / WMCR — a corpus gap plus an over-eager keyword router.</a:t>
+              <a:t>with ground-truth chunk(s) for retrieval scoring.</a:t>
             </a:r>
           </a:p>
           <a:p>
@@ -7319,10 +8854,10 @@
             <a:r>
               <a:rPr b="1" sz="1700">
                 <a:solidFill>
-                  <a:srgbClr val="1F3A5F"/>
-                </a:solidFill>
-              </a:rPr>
-              <a:t>▪  F2 — corpus-gap false positive: </a:t>
+                  <a:srgbClr val="B2691F"/>
+                </a:solidFill>
+              </a:rPr>
+              <a:t>▪  3 retrieval measures — </a:t>
             </a:r>
             <a:r>
               <a:rPr sz="1700">
@@ -7330,7 +8865,7 @@
                   <a:srgbClr val="222222"/>
                 </a:solidFill>
               </a:rPr>
-              <a:t>hybrid stated the $80,000 tax relief cap from passages that only mention it in passing, versus dense's safer abstention.</a:t>
+              <a:t>Hit Rate, Recall@5, Mean Reciprocal Rank (MRR).</a:t>
             </a:r>
           </a:p>
           <a:p>
@@ -7345,10 +8880,10 @@
             <a:r>
               <a:rPr b="1" sz="1700">
                 <a:solidFill>
-                  <a:srgbClr val="1F3A5F"/>
-                </a:solidFill>
-              </a:rPr>
-              <a:t>▪  M2 — under-grounded synthesis: </a:t>
+                  <a:srgbClr val="B2691F"/>
+                </a:solidFill>
+              </a:rPr>
+              <a:t>▪  1 answer-quality measure — </a:t>
             </a:r>
             <a:r>
               <a:rPr sz="1700">
@@ -7356,41 +8891,33 @@
                   <a:srgbClr val="222222"/>
                 </a:solidFill>
               </a:rPr>
-              <a:t>hybrid generated a plausible but only partially correct multi-document answer where dense abstained cleanly instead.</a:t>
-            </a:r>
-          </a:p>
-        </p:txBody>
-      </p:sp>
-      <p:sp>
-        <p:nvSpPr>
-          <p:cNvPr id="6" name="TextBox 5"/>
-          <p:cNvSpPr txBox="1"/>
-          <p:nvPr/>
-        </p:nvSpPr>
-        <p:spPr>
-          <a:xfrm>
-            <a:off x="9692640" y="6446520"/>
-            <a:ext cx="2286000" cy="320040"/>
-          </a:xfrm>
-          <a:prstGeom prst="rect">
-            <a:avLst/>
-          </a:prstGeom>
-          <a:noFill/>
-        </p:spPr>
-        <p:txBody>
-          <a:bodyPr wrap="none">
-            <a:spAutoFit/>
-          </a:bodyPr>
-          <a:lstStyle/>
-          <a:p>
-            <a:pPr algn="r"/>
-            <a:r>
-              <a:rPr sz="1100" i="1">
-                <a:solidFill>
-                  <a:srgbClr val="6B6B6B"/>
-                </a:solidFill>
-              </a:rPr>
-              <a:t>Presented by: [Name]</a:t>
+              <a:t>structured 0–2 rubric across Correctness, Faithfulness, Citation accuracy.</a:t>
+            </a:r>
+          </a:p>
+          <a:p>
+            <a:pPr>
+              <a:lnSpc>
+                <a:spcPct val="115000"/>
+              </a:lnSpc>
+              <a:spcAft>
+                <a:spcPts val="1200"/>
+              </a:spcAft>
+            </a:pPr>
+            <a:r>
+              <a:rPr b="1" sz="1700">
+                <a:solidFill>
+                  <a:srgbClr val="B2691F"/>
+                </a:solidFill>
+              </a:rPr>
+              <a:t>▪  Run config — </a:t>
+            </a:r>
+            <a:r>
+              <a:rPr sz="1700">
+                <a:solidFill>
+                  <a:srgbClr val="222222"/>
+                </a:solidFill>
+              </a:rPr>
+              <a:t>gpt-5.4-mini, BAAI/bge-m3 embeddings, top_k=5, query rewrite off (to isolate the retrieval-mode comparison).</a:t>
             </a:r>
           </a:p>
         </p:txBody>
